--- a/Лекция5/Лекция5.pptx
+++ b/Лекция5/Лекция5.pptx
@@ -12,7 +12,7 @@
     <p:sldId id="296" r:id="rId3"/>
     <p:sldId id="301" r:id="rId4"/>
     <p:sldId id="302" r:id="rId5"/>
-    <p:sldId id="303" r:id="rId6"/>
+    <p:sldId id="307" r:id="rId6"/>
     <p:sldId id="304" r:id="rId7"/>
     <p:sldId id="305" r:id="rId8"/>
     <p:sldId id="295" r:id="rId9"/>
@@ -204,7 +204,7 @@
           <a:p>
             <a:fld id="{79B5F00A-51B7-4331-8B21-77675F9FED1E}" type="datetimeFigureOut">
               <a:rPr lang="ru-RU" smtClean="0"/>
-              <a:t>06.09.2026</a:t>
+              <a:t>04.10.2026</a:t>
             </a:fld>
             <a:endParaRPr lang="ru-RU"/>
           </a:p>
@@ -3559,82 +3559,6 @@
           <a:chExt cx="0" cy="0"/>
         </a:xfrm>
       </p:grpSpPr>
-      <p:pic>
-        <p:nvPicPr>
-          <p:cNvPr id="9" name="Picture 2">
-            <a:extLst>
-              <a:ext uri="{FF2B5EF4-FFF2-40B4-BE49-F238E27FC236}">
-                <a16:creationId xmlns:a16="http://schemas.microsoft.com/office/drawing/2014/main" id="{34A88021-ADF8-405C-9BB1-621815F0B0AD}"/>
-              </a:ext>
-            </a:extLst>
-          </p:cNvPr>
-          <p:cNvPicPr>
-            <a:picLocks noChangeAspect="1" noChangeArrowheads="1"/>
-          </p:cNvPicPr>
-          <p:nvPr/>
-        </p:nvPicPr>
-        <p:blipFill>
-          <a:blip r:embed="rId2" cstate="print"/>
-          <a:srcRect/>
-          <a:stretch>
-            <a:fillRect/>
-          </a:stretch>
-        </p:blipFill>
-        <p:spPr bwMode="auto">
-          <a:xfrm>
-            <a:off x="676801" y="4543425"/>
-            <a:ext cx="10356510" cy="1685943"/>
-          </a:xfrm>
-          <a:prstGeom prst="rect">
-            <a:avLst/>
-          </a:prstGeom>
-          <a:noFill/>
-          <a:ln w="9525">
-            <a:noFill/>
-            <a:miter lim="800000"/>
-            <a:headEnd/>
-            <a:tailEnd/>
-          </a:ln>
-        </p:spPr>
-      </p:pic>
-      <p:pic>
-        <p:nvPicPr>
-          <p:cNvPr id="8" name="Picture 1">
-            <a:extLst>
-              <a:ext uri="{FF2B5EF4-FFF2-40B4-BE49-F238E27FC236}">
-                <a16:creationId xmlns:a16="http://schemas.microsoft.com/office/drawing/2014/main" id="{94192071-780F-4FBB-B1C0-FA4278015F4F}"/>
-              </a:ext>
-            </a:extLst>
-          </p:cNvPr>
-          <p:cNvPicPr>
-            <a:picLocks noChangeAspect="1" noChangeArrowheads="1"/>
-          </p:cNvPicPr>
-          <p:nvPr/>
-        </p:nvPicPr>
-        <p:blipFill>
-          <a:blip r:embed="rId3" cstate="print"/>
-          <a:srcRect l="1742"/>
-          <a:stretch>
-            <a:fillRect/>
-          </a:stretch>
-        </p:blipFill>
-        <p:spPr bwMode="auto">
-          <a:xfrm>
-            <a:off x="676801" y="857231"/>
-            <a:ext cx="10283009" cy="3609993"/>
-          </a:xfrm>
-          <a:prstGeom prst="rect">
-            <a:avLst/>
-          </a:prstGeom>
-          <a:noFill/>
-          <a:ln w="9525">
-            <a:noFill/>
-            <a:miter lim="800000"/>
-            <a:headEnd/>
-            <a:tailEnd/>
-          </a:ln>
-        </p:spPr>
-      </p:pic>
       <p:sp>
         <p:nvSpPr>
           <p:cNvPr id="2" name="Заголовок 1">
@@ -3664,8 +3588,16 @@
           <a:lstStyle/>
           <a:p>
             <a:r>
+              <a:rPr lang="ru-RU" dirty="0" smtClean="0"/>
+              <a:t>Структурная схема </a:t>
+            </a:r>
+            <a:r>
+              <a:rPr lang="ru-RU" dirty="0" smtClean="0"/>
+              <a:t>двигателя </a:t>
+            </a:r>
+            <a:r>
               <a:rPr lang="ru-RU" dirty="0"/>
-              <a:t>Передаточная функция двигателя постоянного тока</a:t>
+              <a:t>постоянного тока</a:t>
             </a:r>
           </a:p>
         </p:txBody>
@@ -3700,6 +3632,1090 @@
           </a:p>
         </p:txBody>
       </p:sp>
+      <mc:AlternateContent xmlns:mc="http://schemas.openxmlformats.org/markup-compatibility/2006">
+        <mc:Choice xmlns:a14="http://schemas.microsoft.com/office/drawing/2010/main" Requires="a14">
+          <p:sp>
+            <p:nvSpPr>
+              <p:cNvPr id="4" name="TextBox 3"/>
+              <p:cNvSpPr txBox="1"/>
+              <p:nvPr/>
+            </p:nvSpPr>
+            <p:spPr>
+              <a:xfrm>
+                <a:off x="1539551" y="1059488"/>
+                <a:ext cx="9509319" cy="2676245"/>
+              </a:xfrm>
+              <a:prstGeom prst="rect">
+                <a:avLst/>
+              </a:prstGeom>
+              <a:noFill/>
+            </p:spPr>
+            <p:txBody>
+              <a:bodyPr wrap="square" rtlCol="0">
+                <a:spAutoFit/>
+              </a:bodyPr>
+              <a:lstStyle/>
+              <a:p>
+                <a:pPr/>
+                <a14:m>
+                  <m:oMathPara xmlns:m="http://schemas.openxmlformats.org/officeDocument/2006/math">
+                    <m:oMathParaPr>
+                      <m:jc m:val="left"/>
+                    </m:oMathParaPr>
+                    <m:oMath xmlns:m="http://schemas.openxmlformats.org/officeDocument/2006/math">
+                      <m:d>
+                        <m:dPr>
+                          <m:begChr m:val="{"/>
+                          <m:endChr m:val=""/>
+                          <m:ctrlPr>
+                            <a:rPr lang="ru-RU" sz="2800" i="1" smtClean="0">
+                              <a:latin typeface="Cambria Math" panose="02040503050406030204" pitchFamily="18" charset="0"/>
+                            </a:rPr>
+                          </m:ctrlPr>
+                        </m:dPr>
+                        <m:e>
+                          <m:m>
+                            <m:mPr>
+                              <m:mcs>
+                                <m:mc>
+                                  <m:mcPr>
+                                    <m:count m:val="1"/>
+                                    <m:mcJc m:val="center"/>
+                                  </m:mcPr>
+                                </m:mc>
+                              </m:mcs>
+                              <m:ctrlPr>
+                                <a:rPr lang="ru-RU" sz="2800" i="1" smtClean="0">
+                                  <a:latin typeface="Cambria Math" panose="02040503050406030204" pitchFamily="18" charset="0"/>
+                                </a:rPr>
+                              </m:ctrlPr>
+                            </m:mPr>
+                            <m:mr>
+                              <m:e>
+                                <m:sSub>
+                                  <m:sSubPr>
+                                    <m:ctrlPr>
+                                      <a:rPr lang="ru-RU" sz="2800" i="1" smtClean="0">
+                                        <a:latin typeface="Cambria Math" panose="02040503050406030204" pitchFamily="18" charset="0"/>
+                                      </a:rPr>
+                                    </m:ctrlPr>
+                                  </m:sSubPr>
+                                  <m:e>
+                                    <m:r>
+                                      <a:rPr lang="en-US" sz="2800" b="0" i="1" smtClean="0">
+                                        <a:latin typeface="Cambria Math" panose="02040503050406030204" pitchFamily="18" charset="0"/>
+                                      </a:rPr>
+                                      <m:t>𝑈</m:t>
+                                    </m:r>
+                                  </m:e>
+                                  <m:sub>
+                                    <m:r>
+                                      <a:rPr lang="ru-RU" sz="2800" b="0" i="1" smtClean="0">
+                                        <a:latin typeface="Cambria Math" panose="02040503050406030204" pitchFamily="18" charset="0"/>
+                                      </a:rPr>
+                                      <m:t>я</m:t>
+                                    </m:r>
+                                  </m:sub>
+                                </m:sSub>
+                                <m:r>
+                                  <m:rPr>
+                                    <m:brk m:alnAt="7"/>
+                                  </m:rPr>
+                                  <a:rPr lang="ru-RU" sz="2800" b="0" i="1" smtClean="0">
+                                    <a:latin typeface="Cambria Math" panose="02040503050406030204" pitchFamily="18" charset="0"/>
+                                  </a:rPr>
+                                  <m:t>=</m:t>
+                                </m:r>
+                                <m:sSub>
+                                  <m:sSubPr>
+                                    <m:ctrlPr>
+                                      <a:rPr lang="ru-RU" sz="2800" b="0" i="1" smtClean="0">
+                                        <a:latin typeface="Cambria Math" panose="02040503050406030204" pitchFamily="18" charset="0"/>
+                                      </a:rPr>
+                                    </m:ctrlPr>
+                                  </m:sSubPr>
+                                  <m:e>
+                                    <m:r>
+                                      <a:rPr lang="en-US" sz="2800" b="0" i="1" smtClean="0">
+                                        <a:latin typeface="Cambria Math" panose="02040503050406030204" pitchFamily="18" charset="0"/>
+                                      </a:rPr>
+                                      <m:t>𝐿</m:t>
+                                    </m:r>
+                                  </m:e>
+                                  <m:sub>
+                                    <m:r>
+                                      <a:rPr lang="ru-RU" sz="2800" b="0" i="1" smtClean="0">
+                                        <a:latin typeface="Cambria Math" panose="02040503050406030204" pitchFamily="18" charset="0"/>
+                                      </a:rPr>
+                                      <m:t>я</m:t>
+                                    </m:r>
+                                  </m:sub>
+                                </m:sSub>
+                                <m:f>
+                                  <m:fPr>
+                                    <m:ctrlPr>
+                                      <a:rPr lang="ru-RU" sz="2800" b="0" i="1" smtClean="0">
+                                        <a:latin typeface="Cambria Math" panose="02040503050406030204" pitchFamily="18" charset="0"/>
+                                      </a:rPr>
+                                    </m:ctrlPr>
+                                  </m:fPr>
+                                  <m:num>
+                                    <m:r>
+                                      <a:rPr lang="en-US" sz="2800" b="0" i="1" smtClean="0">
+                                        <a:latin typeface="Cambria Math" panose="02040503050406030204" pitchFamily="18" charset="0"/>
+                                      </a:rPr>
+                                      <m:t>𝑑</m:t>
+                                    </m:r>
+                                    <m:sSub>
+                                      <m:sSubPr>
+                                        <m:ctrlPr>
+                                          <a:rPr lang="en-US" sz="2800" b="0" i="1" smtClean="0">
+                                            <a:latin typeface="Cambria Math" panose="02040503050406030204" pitchFamily="18" charset="0"/>
+                                          </a:rPr>
+                                        </m:ctrlPr>
+                                      </m:sSubPr>
+                                      <m:e>
+                                        <m:r>
+                                          <a:rPr lang="en-US" sz="2800" b="0" i="1" smtClean="0">
+                                            <a:latin typeface="Cambria Math" panose="02040503050406030204" pitchFamily="18" charset="0"/>
+                                          </a:rPr>
+                                          <m:t>𝑖</m:t>
+                                        </m:r>
+                                      </m:e>
+                                      <m:sub>
+                                        <m:r>
+                                          <a:rPr lang="ru-RU" sz="2800" b="0" i="1" smtClean="0">
+                                            <a:latin typeface="Cambria Math" panose="02040503050406030204" pitchFamily="18" charset="0"/>
+                                          </a:rPr>
+                                          <m:t>я</m:t>
+                                        </m:r>
+                                      </m:sub>
+                                    </m:sSub>
+                                  </m:num>
+                                  <m:den>
+                                    <m:r>
+                                      <a:rPr lang="en-US" sz="2800" b="0" i="1" smtClean="0">
+                                        <a:latin typeface="Cambria Math" panose="02040503050406030204" pitchFamily="18" charset="0"/>
+                                      </a:rPr>
+                                      <m:t>𝑑𝑡</m:t>
+                                    </m:r>
+                                  </m:den>
+                                </m:f>
+                                <m:r>
+                                  <m:rPr>
+                                    <m:brk m:alnAt="7"/>
+                                  </m:rPr>
+                                  <a:rPr lang="en-US" sz="2800" b="0" i="1" smtClean="0">
+                                    <a:latin typeface="Cambria Math" panose="02040503050406030204" pitchFamily="18" charset="0"/>
+                                  </a:rPr>
+                                  <m:t>+</m:t>
+                                </m:r>
+                                <m:sSub>
+                                  <m:sSubPr>
+                                    <m:ctrlPr>
+                                      <a:rPr lang="en-US" sz="2800" b="0" i="1" smtClean="0">
+                                        <a:latin typeface="Cambria Math" panose="02040503050406030204" pitchFamily="18" charset="0"/>
+                                      </a:rPr>
+                                    </m:ctrlPr>
+                                  </m:sSubPr>
+                                  <m:e>
+                                    <m:r>
+                                      <a:rPr lang="en-US" sz="2800" b="0" i="1" smtClean="0">
+                                        <a:latin typeface="Cambria Math" panose="02040503050406030204" pitchFamily="18" charset="0"/>
+                                      </a:rPr>
+                                      <m:t>𝑅</m:t>
+                                    </m:r>
+                                  </m:e>
+                                  <m:sub>
+                                    <m:r>
+                                      <a:rPr lang="ru-RU" sz="2800" b="0" i="1" smtClean="0">
+                                        <a:latin typeface="Cambria Math" panose="02040503050406030204" pitchFamily="18" charset="0"/>
+                                      </a:rPr>
+                                      <m:t>я</m:t>
+                                    </m:r>
+                                  </m:sub>
+                                </m:sSub>
+                                <m:sSub>
+                                  <m:sSubPr>
+                                    <m:ctrlPr>
+                                      <a:rPr lang="en-US" sz="2800" i="1">
+                                        <a:latin typeface="Cambria Math" panose="02040503050406030204" pitchFamily="18" charset="0"/>
+                                      </a:rPr>
+                                    </m:ctrlPr>
+                                  </m:sSubPr>
+                                  <m:e>
+                                    <m:r>
+                                      <a:rPr lang="en-US" sz="2800" i="1">
+                                        <a:latin typeface="Cambria Math" panose="02040503050406030204" pitchFamily="18" charset="0"/>
+                                      </a:rPr>
+                                      <m:t>𝑖</m:t>
+                                    </m:r>
+                                  </m:e>
+                                  <m:sub>
+                                    <m:r>
+                                      <a:rPr lang="ru-RU" sz="2800" i="1">
+                                        <a:latin typeface="Cambria Math" panose="02040503050406030204" pitchFamily="18" charset="0"/>
+                                      </a:rPr>
+                                      <m:t>я</m:t>
+                                    </m:r>
+                                  </m:sub>
+                                </m:sSub>
+                                <m:r>
+                                  <a:rPr lang="en-US" sz="2800" b="0" i="1" smtClean="0">
+                                    <a:latin typeface="Cambria Math" panose="02040503050406030204" pitchFamily="18" charset="0"/>
+                                  </a:rPr>
+                                  <m:t>+</m:t>
+                                </m:r>
+                                <m:sSub>
+                                  <m:sSubPr>
+                                    <m:ctrlPr>
+                                      <a:rPr lang="en-US" sz="2800" b="0" i="1" smtClean="0">
+                                        <a:latin typeface="Cambria Math" panose="02040503050406030204" pitchFamily="18" charset="0"/>
+                                      </a:rPr>
+                                    </m:ctrlPr>
+                                  </m:sSubPr>
+                                  <m:e>
+                                    <m:r>
+                                      <a:rPr lang="en-US" sz="2800" b="0" i="1" smtClean="0">
+                                        <a:latin typeface="Cambria Math" panose="02040503050406030204" pitchFamily="18" charset="0"/>
+                                      </a:rPr>
+                                      <m:t>𝑘</m:t>
+                                    </m:r>
+                                  </m:e>
+                                  <m:sub>
+                                    <m:r>
+                                      <m:rPr>
+                                        <m:sty m:val="p"/>
+                                      </m:rPr>
+                                      <a:rPr lang="el-GR" sz="2800" b="0" i="1" smtClean="0">
+                                        <a:latin typeface="Cambria Math" panose="02040503050406030204" pitchFamily="18" charset="0"/>
+                                        <a:ea typeface="Cambria Math" panose="02040503050406030204" pitchFamily="18" charset="0"/>
+                                      </a:rPr>
+                                      <m:t>Ω</m:t>
+                                    </m:r>
+                                  </m:sub>
+                                </m:sSub>
+                                <m:sSub>
+                                  <m:sSubPr>
+                                    <m:ctrlPr>
+                                      <a:rPr lang="en-US" sz="2800" b="0" i="1" smtClean="0">
+                                        <a:latin typeface="Cambria Math" panose="02040503050406030204" pitchFamily="18" charset="0"/>
+                                      </a:rPr>
+                                    </m:ctrlPr>
+                                  </m:sSubPr>
+                                  <m:e>
+                                    <m:r>
+                                      <m:rPr>
+                                        <m:sty m:val="p"/>
+                                      </m:rPr>
+                                      <a:rPr lang="el-GR" sz="2800" b="0" i="1" smtClean="0">
+                                        <a:latin typeface="Cambria Math" panose="02040503050406030204" pitchFamily="18" charset="0"/>
+                                        <a:ea typeface="Cambria Math" panose="02040503050406030204" pitchFamily="18" charset="0"/>
+                                      </a:rPr>
+                                      <m:t>Ω</m:t>
+                                    </m:r>
+                                  </m:e>
+                                  <m:sub>
+                                    <m:r>
+                                      <a:rPr lang="ru-RU" sz="2800" b="0" i="1" smtClean="0">
+                                        <a:latin typeface="Cambria Math" panose="02040503050406030204" pitchFamily="18" charset="0"/>
+                                      </a:rPr>
+                                      <m:t>д</m:t>
+                                    </m:r>
+                                  </m:sub>
+                                </m:sSub>
+                                <m:r>
+                                  <a:rPr lang="ru-RU" sz="2800" b="0" i="1" smtClean="0">
+                                    <a:latin typeface="Cambria Math" panose="02040503050406030204" pitchFamily="18" charset="0"/>
+                                  </a:rPr>
+                                  <m:t>;</m:t>
+                                </m:r>
+                              </m:e>
+                            </m:mr>
+                            <m:mr>
+                              <m:e>
+                                <m:m>
+                                  <m:mPr>
+                                    <m:mcs>
+                                      <m:mc>
+                                        <m:mcPr>
+                                          <m:count m:val="1"/>
+                                          <m:mcJc m:val="center"/>
+                                        </m:mcPr>
+                                      </m:mc>
+                                    </m:mcs>
+                                    <m:ctrlPr>
+                                      <a:rPr lang="ru-RU" sz="2800" i="1" smtClean="0">
+                                        <a:latin typeface="Cambria Math" panose="02040503050406030204" pitchFamily="18" charset="0"/>
+                                      </a:rPr>
+                                    </m:ctrlPr>
+                                  </m:mPr>
+                                  <m:mr>
+                                    <m:e>
+                                      <m:sSub>
+                                        <m:sSubPr>
+                                          <m:ctrlPr>
+                                            <a:rPr lang="ru-RU" sz="2800" i="1" smtClean="0">
+                                              <a:latin typeface="Cambria Math" panose="02040503050406030204" pitchFamily="18" charset="0"/>
+                                            </a:rPr>
+                                          </m:ctrlPr>
+                                        </m:sSubPr>
+                                        <m:e>
+                                          <m:r>
+                                            <a:rPr lang="en-US" sz="2800" b="0" i="1" smtClean="0">
+                                              <a:latin typeface="Cambria Math" panose="02040503050406030204" pitchFamily="18" charset="0"/>
+                                            </a:rPr>
+                                            <m:t>𝐽</m:t>
+                                          </m:r>
+                                        </m:e>
+                                        <m:sub>
+                                          <m:r>
+                                            <m:rPr>
+                                              <m:sty m:val="p"/>
+                                            </m:rPr>
+                                            <a:rPr lang="el-GR" sz="2800" i="1" smtClean="0">
+                                              <a:latin typeface="Cambria Math" panose="02040503050406030204" pitchFamily="18" charset="0"/>
+                                              <a:ea typeface="Cambria Math" panose="02040503050406030204" pitchFamily="18" charset="0"/>
+                                            </a:rPr>
+                                            <m:t>Σ</m:t>
+                                          </m:r>
+                                        </m:sub>
+                                      </m:sSub>
+                                      <m:f>
+                                        <m:fPr>
+                                          <m:ctrlPr>
+                                            <a:rPr lang="ru-RU" sz="2800" i="1" smtClean="0">
+                                              <a:latin typeface="Cambria Math" panose="02040503050406030204" pitchFamily="18" charset="0"/>
+                                            </a:rPr>
+                                          </m:ctrlPr>
+                                        </m:fPr>
+                                        <m:num>
+                                          <m:r>
+                                            <a:rPr lang="en-US" sz="2800" b="0" i="1" smtClean="0">
+                                              <a:latin typeface="Cambria Math" panose="02040503050406030204" pitchFamily="18" charset="0"/>
+                                            </a:rPr>
+                                            <m:t>𝑑</m:t>
+                                          </m:r>
+                                          <m:sSub>
+                                            <m:sSubPr>
+                                              <m:ctrlPr>
+                                                <a:rPr lang="en-US" sz="2800" i="1">
+                                                  <a:latin typeface="Cambria Math" panose="02040503050406030204" pitchFamily="18" charset="0"/>
+                                                </a:rPr>
+                                              </m:ctrlPr>
+                                            </m:sSubPr>
+                                            <m:e>
+                                              <m:r>
+                                                <m:rPr>
+                                                  <m:sty m:val="p"/>
+                                                </m:rPr>
+                                                <a:rPr lang="el-GR" sz="2800" i="1">
+                                                  <a:latin typeface="Cambria Math" panose="02040503050406030204" pitchFamily="18" charset="0"/>
+                                                  <a:ea typeface="Cambria Math" panose="02040503050406030204" pitchFamily="18" charset="0"/>
+                                                </a:rPr>
+                                                <m:t>Ω</m:t>
+                                              </m:r>
+                                            </m:e>
+                                            <m:sub>
+                                              <m:r>
+                                                <a:rPr lang="ru-RU" sz="2800" i="1">
+                                                  <a:latin typeface="Cambria Math" panose="02040503050406030204" pitchFamily="18" charset="0"/>
+                                                </a:rPr>
+                                                <m:t>д</m:t>
+                                              </m:r>
+                                            </m:sub>
+                                          </m:sSub>
+                                        </m:num>
+                                        <m:den>
+                                          <m:r>
+                                            <a:rPr lang="en-US" sz="2800" b="0" i="1" smtClean="0">
+                                              <a:latin typeface="Cambria Math" panose="02040503050406030204" pitchFamily="18" charset="0"/>
+                                            </a:rPr>
+                                            <m:t>𝑑𝑡</m:t>
+                                          </m:r>
+                                        </m:den>
+                                      </m:f>
+                                      <m:r>
+                                        <m:rPr>
+                                          <m:brk m:alnAt="7"/>
+                                        </m:rPr>
+                                        <a:rPr lang="en-US" sz="2800" b="0" i="1" smtClean="0">
+                                          <a:latin typeface="Cambria Math" panose="02040503050406030204" pitchFamily="18" charset="0"/>
+                                        </a:rPr>
+                                        <m:t>=</m:t>
+                                      </m:r>
+                                      <m:sSub>
+                                        <m:sSubPr>
+                                          <m:ctrlPr>
+                                            <a:rPr lang="en-US" sz="2800" b="0" i="1" smtClean="0">
+                                              <a:latin typeface="Cambria Math" panose="02040503050406030204" pitchFamily="18" charset="0"/>
+                                            </a:rPr>
+                                          </m:ctrlPr>
+                                        </m:sSubPr>
+                                        <m:e>
+                                          <m:r>
+                                            <a:rPr lang="en-US" sz="2800" b="0" i="1" smtClean="0">
+                                              <a:latin typeface="Cambria Math" panose="02040503050406030204" pitchFamily="18" charset="0"/>
+                                            </a:rPr>
+                                            <m:t>𝑀</m:t>
+                                          </m:r>
+                                        </m:e>
+                                        <m:sub>
+                                          <m:r>
+                                            <a:rPr lang="ru-RU" sz="2800" b="0" i="1" smtClean="0">
+                                              <a:latin typeface="Cambria Math" panose="02040503050406030204" pitchFamily="18" charset="0"/>
+                                            </a:rPr>
+                                            <m:t>д</m:t>
+                                          </m:r>
+                                        </m:sub>
+                                      </m:sSub>
+                                      <m:r>
+                                        <m:rPr>
+                                          <m:brk m:alnAt="7"/>
+                                        </m:rPr>
+                                        <a:rPr lang="ru-RU" sz="2800" b="0" i="1" smtClean="0">
+                                          <a:latin typeface="Cambria Math" panose="02040503050406030204" pitchFamily="18" charset="0"/>
+                                        </a:rPr>
+                                        <m:t>;                           </m:t>
+                                      </m:r>
+                                    </m:e>
+                                  </m:mr>
+                                  <m:mr>
+                                    <m:e>
+                                      <m:sSub>
+                                        <m:sSubPr>
+                                          <m:ctrlPr>
+                                            <a:rPr lang="ru-RU" sz="2800" i="1">
+                                              <a:latin typeface="Cambria Math" panose="02040503050406030204" pitchFamily="18" charset="0"/>
+                                            </a:rPr>
+                                          </m:ctrlPr>
+                                        </m:sSubPr>
+                                        <m:e>
+                                          <m:r>
+                                            <a:rPr lang="en-US" sz="2800" i="1">
+                                              <a:latin typeface="Cambria Math" panose="02040503050406030204" pitchFamily="18" charset="0"/>
+                                            </a:rPr>
+                                            <m:t>𝐽</m:t>
+                                          </m:r>
+                                        </m:e>
+                                        <m:sub>
+                                          <m:r>
+                                            <m:rPr>
+                                              <m:sty m:val="p"/>
+                                            </m:rPr>
+                                            <a:rPr lang="el-GR" sz="2800" i="1">
+                                              <a:latin typeface="Cambria Math" panose="02040503050406030204" pitchFamily="18" charset="0"/>
+                                              <a:ea typeface="Cambria Math" panose="02040503050406030204" pitchFamily="18" charset="0"/>
+                                            </a:rPr>
+                                            <m:t>Σ</m:t>
+                                          </m:r>
+                                        </m:sub>
+                                      </m:sSub>
+                                      <m:f>
+                                        <m:fPr>
+                                          <m:ctrlPr>
+                                            <a:rPr lang="ru-RU" sz="2800" i="1">
+                                              <a:latin typeface="Cambria Math" panose="02040503050406030204" pitchFamily="18" charset="0"/>
+                                            </a:rPr>
+                                          </m:ctrlPr>
+                                        </m:fPr>
+                                        <m:num>
+                                          <m:r>
+                                            <a:rPr lang="en-US" sz="2800" i="1">
+                                              <a:latin typeface="Cambria Math" panose="02040503050406030204" pitchFamily="18" charset="0"/>
+                                            </a:rPr>
+                                            <m:t>𝑑</m:t>
+                                          </m:r>
+                                          <m:sSub>
+                                            <m:sSubPr>
+                                              <m:ctrlPr>
+                                                <a:rPr lang="en-US" sz="2800" i="1">
+                                                  <a:latin typeface="Cambria Math" panose="02040503050406030204" pitchFamily="18" charset="0"/>
+                                                </a:rPr>
+                                              </m:ctrlPr>
+                                            </m:sSubPr>
+                                            <m:e>
+                                              <m:r>
+                                                <m:rPr>
+                                                  <m:sty m:val="p"/>
+                                                </m:rPr>
+                                                <a:rPr lang="el-GR" sz="2800" i="1">
+                                                  <a:latin typeface="Cambria Math" panose="02040503050406030204" pitchFamily="18" charset="0"/>
+                                                  <a:ea typeface="Cambria Math" panose="02040503050406030204" pitchFamily="18" charset="0"/>
+                                                </a:rPr>
+                                                <m:t>Ω</m:t>
+                                              </m:r>
+                                            </m:e>
+                                            <m:sub>
+                                              <m:r>
+                                                <a:rPr lang="ru-RU" sz="2800" i="1">
+                                                  <a:latin typeface="Cambria Math" panose="02040503050406030204" pitchFamily="18" charset="0"/>
+                                                </a:rPr>
+                                                <m:t>д</m:t>
+                                              </m:r>
+                                            </m:sub>
+                                          </m:sSub>
+                                        </m:num>
+                                        <m:den>
+                                          <m:r>
+                                            <a:rPr lang="en-US" sz="2800" i="1">
+                                              <a:latin typeface="Cambria Math" panose="02040503050406030204" pitchFamily="18" charset="0"/>
+                                            </a:rPr>
+                                            <m:t>𝑑𝑡</m:t>
+                                          </m:r>
+                                        </m:den>
+                                      </m:f>
+                                      <m:r>
+                                        <m:rPr>
+                                          <m:brk m:alnAt="7"/>
+                                        </m:rPr>
+                                        <a:rPr lang="en-US" sz="2800" i="1">
+                                          <a:latin typeface="Cambria Math" panose="02040503050406030204" pitchFamily="18" charset="0"/>
+                                        </a:rPr>
+                                        <m:t>=</m:t>
+                                      </m:r>
+                                      <m:sSub>
+                                        <m:sSubPr>
+                                          <m:ctrlPr>
+                                            <a:rPr lang="en-US" sz="2800" i="1" smtClean="0">
+                                              <a:latin typeface="Cambria Math" panose="02040503050406030204" pitchFamily="18" charset="0"/>
+                                            </a:rPr>
+                                          </m:ctrlPr>
+                                        </m:sSubPr>
+                                        <m:e>
+                                          <m:r>
+                                            <a:rPr lang="en-US" sz="2800" b="0" i="1" smtClean="0">
+                                              <a:latin typeface="Cambria Math" panose="02040503050406030204" pitchFamily="18" charset="0"/>
+                                            </a:rPr>
+                                            <m:t>𝑘</m:t>
+                                          </m:r>
+                                        </m:e>
+                                        <m:sub>
+                                          <m:r>
+                                            <a:rPr lang="ru-RU" sz="2800" b="0" i="1" smtClean="0">
+                                              <a:latin typeface="Cambria Math" panose="02040503050406030204" pitchFamily="18" charset="0"/>
+                                            </a:rPr>
+                                            <m:t>м</m:t>
+                                          </m:r>
+                                        </m:sub>
+                                      </m:sSub>
+                                      <m:sSub>
+                                        <m:sSubPr>
+                                          <m:ctrlPr>
+                                            <a:rPr lang="en-US" sz="2800" i="1">
+                                              <a:latin typeface="Cambria Math" panose="02040503050406030204" pitchFamily="18" charset="0"/>
+                                            </a:rPr>
+                                          </m:ctrlPr>
+                                        </m:sSubPr>
+                                        <m:e>
+                                          <m:r>
+                                            <a:rPr lang="en-US" sz="2800" i="1">
+                                              <a:latin typeface="Cambria Math" panose="02040503050406030204" pitchFamily="18" charset="0"/>
+                                            </a:rPr>
+                                            <m:t>𝑖</m:t>
+                                          </m:r>
+                                        </m:e>
+                                        <m:sub>
+                                          <m:r>
+                                            <a:rPr lang="ru-RU" sz="2800" i="1">
+                                              <a:latin typeface="Cambria Math" panose="02040503050406030204" pitchFamily="18" charset="0"/>
+                                            </a:rPr>
+                                            <m:t>я</m:t>
+                                          </m:r>
+                                        </m:sub>
+                                      </m:sSub>
+                                      <m:r>
+                                        <a:rPr lang="ru-RU" sz="2800" b="0" i="1" smtClean="0">
+                                          <a:latin typeface="Cambria Math" panose="02040503050406030204" pitchFamily="18" charset="0"/>
+                                        </a:rPr>
+                                        <m:t>,                           </m:t>
+                                      </m:r>
+                                    </m:e>
+                                  </m:mr>
+                                </m:m>
+                              </m:e>
+                            </m:mr>
+                          </m:m>
+                          <m:r>
+                            <a:rPr lang="ru-RU" sz="2800" b="0" i="1" smtClean="0">
+                              <a:latin typeface="Cambria Math" panose="02040503050406030204" pitchFamily="18" charset="0"/>
+                            </a:rPr>
+                            <m:t>⇒</m:t>
+                          </m:r>
+                          <m:r>
+                            <a:rPr lang="en-US" sz="2800" b="0" i="1" smtClean="0">
+                              <a:latin typeface="Cambria Math" panose="02040503050406030204" pitchFamily="18" charset="0"/>
+                            </a:rPr>
+                            <m:t> </m:t>
+                          </m:r>
+                        </m:e>
+                      </m:d>
+                      <m:d>
+                        <m:dPr>
+                          <m:begChr m:val="{"/>
+                          <m:endChr m:val=""/>
+                          <m:ctrlPr>
+                            <a:rPr lang="ru-RU" sz="2800" i="1" smtClean="0">
+                              <a:latin typeface="Cambria Math" panose="02040503050406030204" pitchFamily="18" charset="0"/>
+                            </a:rPr>
+                          </m:ctrlPr>
+                        </m:dPr>
+                        <m:e>
+                          <m:m>
+                            <m:mPr>
+                              <m:mcs>
+                                <m:mc>
+                                  <m:mcPr>
+                                    <m:count m:val="1"/>
+                                    <m:mcJc m:val="center"/>
+                                  </m:mcPr>
+                                </m:mc>
+                              </m:mcs>
+                              <m:ctrlPr>
+                                <a:rPr lang="ru-RU" sz="2800" i="1" smtClean="0">
+                                  <a:latin typeface="Cambria Math" panose="02040503050406030204" pitchFamily="18" charset="0"/>
+                                </a:rPr>
+                              </m:ctrlPr>
+                            </m:mPr>
+                            <m:mr>
+                              <m:e>
+                                <m:sSub>
+                                  <m:sSubPr>
+                                    <m:ctrlPr>
+                                      <a:rPr lang="ru-RU" sz="2800" i="1">
+                                        <a:latin typeface="Cambria Math" panose="02040503050406030204" pitchFamily="18" charset="0"/>
+                                      </a:rPr>
+                                    </m:ctrlPr>
+                                  </m:sSubPr>
+                                  <m:e>
+                                    <m:r>
+                                      <a:rPr lang="en-US" sz="2800" i="1">
+                                        <a:latin typeface="Cambria Math" panose="02040503050406030204" pitchFamily="18" charset="0"/>
+                                      </a:rPr>
+                                      <m:t>𝑈</m:t>
+                                    </m:r>
+                                  </m:e>
+                                  <m:sub>
+                                    <m:r>
+                                      <a:rPr lang="ru-RU" sz="2800" i="1">
+                                        <a:latin typeface="Cambria Math" panose="02040503050406030204" pitchFamily="18" charset="0"/>
+                                      </a:rPr>
+                                      <m:t>я</m:t>
+                                    </m:r>
+                                  </m:sub>
+                                </m:sSub>
+                                <m:r>
+                                  <a:rPr lang="ru-RU" sz="2800" b="0" i="1" smtClean="0">
+                                    <a:latin typeface="Cambria Math" panose="02040503050406030204" pitchFamily="18" charset="0"/>
+                                  </a:rPr>
+                                  <m:t>−</m:t>
+                                </m:r>
+                                <m:sSub>
+                                  <m:sSubPr>
+                                    <m:ctrlPr>
+                                      <a:rPr lang="en-US" sz="2800" i="1">
+                                        <a:latin typeface="Cambria Math" panose="02040503050406030204" pitchFamily="18" charset="0"/>
+                                      </a:rPr>
+                                    </m:ctrlPr>
+                                  </m:sSubPr>
+                                  <m:e>
+                                    <m:r>
+                                      <a:rPr lang="en-US" sz="2800" i="1">
+                                        <a:latin typeface="Cambria Math" panose="02040503050406030204" pitchFamily="18" charset="0"/>
+                                      </a:rPr>
+                                      <m:t>𝑘</m:t>
+                                    </m:r>
+                                  </m:e>
+                                  <m:sub>
+                                    <m:r>
+                                      <m:rPr>
+                                        <m:sty m:val="p"/>
+                                      </m:rPr>
+                                      <a:rPr lang="el-GR" sz="2800" i="1">
+                                        <a:latin typeface="Cambria Math" panose="02040503050406030204" pitchFamily="18" charset="0"/>
+                                        <a:ea typeface="Cambria Math" panose="02040503050406030204" pitchFamily="18" charset="0"/>
+                                      </a:rPr>
+                                      <m:t>Ω</m:t>
+                                    </m:r>
+                                  </m:sub>
+                                </m:sSub>
+                                <m:sSub>
+                                  <m:sSubPr>
+                                    <m:ctrlPr>
+                                      <a:rPr lang="en-US" sz="2800" i="1">
+                                        <a:latin typeface="Cambria Math" panose="02040503050406030204" pitchFamily="18" charset="0"/>
+                                      </a:rPr>
+                                    </m:ctrlPr>
+                                  </m:sSubPr>
+                                  <m:e>
+                                    <m:r>
+                                      <m:rPr>
+                                        <m:sty m:val="p"/>
+                                      </m:rPr>
+                                      <a:rPr lang="el-GR" sz="2800" i="1">
+                                        <a:latin typeface="Cambria Math" panose="02040503050406030204" pitchFamily="18" charset="0"/>
+                                        <a:ea typeface="Cambria Math" panose="02040503050406030204" pitchFamily="18" charset="0"/>
+                                      </a:rPr>
+                                      <m:t>Ω</m:t>
+                                    </m:r>
+                                  </m:e>
+                                  <m:sub>
+                                    <m:r>
+                                      <a:rPr lang="ru-RU" sz="2800" i="1">
+                                        <a:latin typeface="Cambria Math" panose="02040503050406030204" pitchFamily="18" charset="0"/>
+                                      </a:rPr>
+                                      <m:t>д</m:t>
+                                    </m:r>
+                                  </m:sub>
+                                </m:sSub>
+                                <m:r>
+                                  <a:rPr lang="ru-RU" sz="2800" b="0" i="1" smtClean="0">
+                                    <a:latin typeface="Cambria Math" panose="02040503050406030204" pitchFamily="18" charset="0"/>
+                                  </a:rPr>
+                                  <m:t>=</m:t>
+                                </m:r>
+                                <m:sSub>
+                                  <m:sSubPr>
+                                    <m:ctrlPr>
+                                      <a:rPr lang="en-US" sz="2800" i="1">
+                                        <a:latin typeface="Cambria Math" panose="02040503050406030204" pitchFamily="18" charset="0"/>
+                                      </a:rPr>
+                                    </m:ctrlPr>
+                                  </m:sSubPr>
+                                  <m:e>
+                                    <m:r>
+                                      <a:rPr lang="en-US" sz="2800" i="1">
+                                        <a:latin typeface="Cambria Math" panose="02040503050406030204" pitchFamily="18" charset="0"/>
+                                      </a:rPr>
+                                      <m:t>𝑖</m:t>
+                                    </m:r>
+                                  </m:e>
+                                  <m:sub>
+                                    <m:r>
+                                      <a:rPr lang="ru-RU" sz="2800" i="1">
+                                        <a:latin typeface="Cambria Math" panose="02040503050406030204" pitchFamily="18" charset="0"/>
+                                      </a:rPr>
+                                      <m:t>я</m:t>
+                                    </m:r>
+                                  </m:sub>
+                                </m:sSub>
+                                <m:d>
+                                  <m:dPr>
+                                    <m:ctrlPr>
+                                      <a:rPr lang="ru-RU" sz="2800" b="0" i="1" smtClean="0">
+                                        <a:latin typeface="Cambria Math" panose="02040503050406030204" pitchFamily="18" charset="0"/>
+                                      </a:rPr>
+                                    </m:ctrlPr>
+                                  </m:dPr>
+                                  <m:e>
+                                    <m:sSub>
+                                      <m:sSubPr>
+                                        <m:ctrlPr>
+                                          <a:rPr lang="ru-RU" sz="2800" i="1">
+                                            <a:latin typeface="Cambria Math" panose="02040503050406030204" pitchFamily="18" charset="0"/>
+                                          </a:rPr>
+                                        </m:ctrlPr>
+                                      </m:sSubPr>
+                                      <m:e>
+                                        <m:r>
+                                          <a:rPr lang="en-US" sz="2800" i="1">
+                                            <a:latin typeface="Cambria Math" panose="02040503050406030204" pitchFamily="18" charset="0"/>
+                                          </a:rPr>
+                                          <m:t>𝐿</m:t>
+                                        </m:r>
+                                      </m:e>
+                                      <m:sub>
+                                        <m:r>
+                                          <a:rPr lang="ru-RU" sz="2800" i="1">
+                                            <a:latin typeface="Cambria Math" panose="02040503050406030204" pitchFamily="18" charset="0"/>
+                                          </a:rPr>
+                                          <m:t>я</m:t>
+                                        </m:r>
+                                      </m:sub>
+                                    </m:sSub>
+                                    <m:r>
+                                      <a:rPr lang="en-US" sz="2800" b="0" i="1" smtClean="0">
+                                        <a:latin typeface="Cambria Math" panose="02040503050406030204" pitchFamily="18" charset="0"/>
+                                      </a:rPr>
+                                      <m:t>𝑝</m:t>
+                                    </m:r>
+                                    <m:r>
+                                      <a:rPr lang="en-US" sz="2800" b="0" i="1" smtClean="0">
+                                        <a:latin typeface="Cambria Math" panose="02040503050406030204" pitchFamily="18" charset="0"/>
+                                      </a:rPr>
+                                      <m:t>+</m:t>
+                                    </m:r>
+                                    <m:sSub>
+                                      <m:sSubPr>
+                                        <m:ctrlPr>
+                                          <a:rPr lang="en-US" sz="2800" i="1">
+                                            <a:latin typeface="Cambria Math" panose="02040503050406030204" pitchFamily="18" charset="0"/>
+                                          </a:rPr>
+                                        </m:ctrlPr>
+                                      </m:sSubPr>
+                                      <m:e>
+                                        <m:r>
+                                          <a:rPr lang="en-US" sz="2800" i="1">
+                                            <a:latin typeface="Cambria Math" panose="02040503050406030204" pitchFamily="18" charset="0"/>
+                                          </a:rPr>
+                                          <m:t>𝑅</m:t>
+                                        </m:r>
+                                      </m:e>
+                                      <m:sub>
+                                        <m:r>
+                                          <a:rPr lang="ru-RU" sz="2800" i="1">
+                                            <a:latin typeface="Cambria Math" panose="02040503050406030204" pitchFamily="18" charset="0"/>
+                                          </a:rPr>
+                                          <m:t>я</m:t>
+                                        </m:r>
+                                      </m:sub>
+                                    </m:sSub>
+                                  </m:e>
+                                </m:d>
+                                <m:r>
+                                  <a:rPr lang="en-US" sz="2800" b="0" i="1" smtClean="0">
+                                    <a:latin typeface="Cambria Math" panose="02040503050406030204" pitchFamily="18" charset="0"/>
+                                  </a:rPr>
+                                  <m:t>;</m:t>
+                                </m:r>
+                              </m:e>
+                            </m:mr>
+                            <m:mr>
+                              <m:e>
+                                <m:f>
+                                  <m:fPr>
+                                    <m:ctrlPr>
+                                      <a:rPr lang="ru-RU" sz="2800" i="1">
+                                        <a:latin typeface="Cambria Math" panose="02040503050406030204" pitchFamily="18" charset="0"/>
+                                      </a:rPr>
+                                    </m:ctrlPr>
+                                  </m:fPr>
+                                  <m:num>
+                                    <m:r>
+                                      <a:rPr lang="en-US" sz="2800" i="1">
+                                        <a:latin typeface="Cambria Math" panose="02040503050406030204" pitchFamily="18" charset="0"/>
+                                      </a:rPr>
+                                      <m:t>𝑑</m:t>
+                                    </m:r>
+                                    <m:sSub>
+                                      <m:sSubPr>
+                                        <m:ctrlPr>
+                                          <a:rPr lang="en-US" sz="2800" i="1">
+                                            <a:latin typeface="Cambria Math" panose="02040503050406030204" pitchFamily="18" charset="0"/>
+                                          </a:rPr>
+                                        </m:ctrlPr>
+                                      </m:sSubPr>
+                                      <m:e>
+                                        <m:r>
+                                          <m:rPr>
+                                            <m:sty m:val="p"/>
+                                          </m:rPr>
+                                          <a:rPr lang="el-GR" sz="2800" i="1">
+                                            <a:latin typeface="Cambria Math" panose="02040503050406030204" pitchFamily="18" charset="0"/>
+                                            <a:ea typeface="Cambria Math" panose="02040503050406030204" pitchFamily="18" charset="0"/>
+                                          </a:rPr>
+                                          <m:t>Ω</m:t>
+                                        </m:r>
+                                      </m:e>
+                                      <m:sub>
+                                        <m:r>
+                                          <a:rPr lang="ru-RU" sz="2800" i="1">
+                                            <a:latin typeface="Cambria Math" panose="02040503050406030204" pitchFamily="18" charset="0"/>
+                                          </a:rPr>
+                                          <m:t>д</m:t>
+                                        </m:r>
+                                      </m:sub>
+                                    </m:sSub>
+                                  </m:num>
+                                  <m:den>
+                                    <m:r>
+                                      <a:rPr lang="en-US" sz="2800" i="1">
+                                        <a:latin typeface="Cambria Math" panose="02040503050406030204" pitchFamily="18" charset="0"/>
+                                      </a:rPr>
+                                      <m:t>𝑑𝑡</m:t>
+                                    </m:r>
+                                  </m:den>
+                                </m:f>
+                                <m:r>
+                                  <a:rPr lang="en-US" sz="2800" b="0" i="1" smtClean="0">
+                                    <a:latin typeface="Cambria Math" panose="02040503050406030204" pitchFamily="18" charset="0"/>
+                                  </a:rPr>
+                                  <m:t>=</m:t>
+                                </m:r>
+                                <m:f>
+                                  <m:fPr>
+                                    <m:ctrlPr>
+                                      <a:rPr lang="en-US" sz="2800" b="0" i="1" smtClean="0">
+                                        <a:latin typeface="Cambria Math" panose="02040503050406030204" pitchFamily="18" charset="0"/>
+                                      </a:rPr>
+                                    </m:ctrlPr>
+                                  </m:fPr>
+                                  <m:num>
+                                    <m:sSub>
+                                      <m:sSubPr>
+                                        <m:ctrlPr>
+                                          <a:rPr lang="en-US" sz="2800" i="1">
+                                            <a:latin typeface="Cambria Math" panose="02040503050406030204" pitchFamily="18" charset="0"/>
+                                          </a:rPr>
+                                        </m:ctrlPr>
+                                      </m:sSubPr>
+                                      <m:e>
+                                        <m:r>
+                                          <a:rPr lang="en-US" sz="2800" i="1">
+                                            <a:latin typeface="Cambria Math" panose="02040503050406030204" pitchFamily="18" charset="0"/>
+                                          </a:rPr>
+                                          <m:t>𝑘</m:t>
+                                        </m:r>
+                                      </m:e>
+                                      <m:sub>
+                                        <m:r>
+                                          <a:rPr lang="ru-RU" sz="2800" i="1">
+                                            <a:latin typeface="Cambria Math" panose="02040503050406030204" pitchFamily="18" charset="0"/>
+                                          </a:rPr>
+                                          <m:t>м</m:t>
+                                        </m:r>
+                                      </m:sub>
+                                    </m:sSub>
+                                  </m:num>
+                                  <m:den>
+                                    <m:sSub>
+                                      <m:sSubPr>
+                                        <m:ctrlPr>
+                                          <a:rPr lang="ru-RU" sz="2800" i="1">
+                                            <a:latin typeface="Cambria Math" panose="02040503050406030204" pitchFamily="18" charset="0"/>
+                                          </a:rPr>
+                                        </m:ctrlPr>
+                                      </m:sSubPr>
+                                      <m:e>
+                                        <m:r>
+                                          <a:rPr lang="en-US" sz="2800" i="1">
+                                            <a:latin typeface="Cambria Math" panose="02040503050406030204" pitchFamily="18" charset="0"/>
+                                          </a:rPr>
+                                          <m:t>𝐽</m:t>
+                                        </m:r>
+                                      </m:e>
+                                      <m:sub>
+                                        <m:r>
+                                          <m:rPr>
+                                            <m:sty m:val="p"/>
+                                          </m:rPr>
+                                          <a:rPr lang="el-GR" sz="2800" i="1">
+                                            <a:latin typeface="Cambria Math" panose="02040503050406030204" pitchFamily="18" charset="0"/>
+                                            <a:ea typeface="Cambria Math" panose="02040503050406030204" pitchFamily="18" charset="0"/>
+                                          </a:rPr>
+                                          <m:t>Σ</m:t>
+                                        </m:r>
+                                      </m:sub>
+                                    </m:sSub>
+                                  </m:den>
+                                </m:f>
+                                <m:sSub>
+                                  <m:sSubPr>
+                                    <m:ctrlPr>
+                                      <a:rPr lang="en-US" sz="2800" i="1">
+                                        <a:latin typeface="Cambria Math" panose="02040503050406030204" pitchFamily="18" charset="0"/>
+                                      </a:rPr>
+                                    </m:ctrlPr>
+                                  </m:sSubPr>
+                                  <m:e>
+                                    <m:r>
+                                      <a:rPr lang="en-US" sz="2800" i="1">
+                                        <a:latin typeface="Cambria Math" panose="02040503050406030204" pitchFamily="18" charset="0"/>
+                                      </a:rPr>
+                                      <m:t>𝑖</m:t>
+                                    </m:r>
+                                  </m:e>
+                                  <m:sub>
+                                    <m:r>
+                                      <a:rPr lang="ru-RU" sz="2800" i="1">
+                                        <a:latin typeface="Cambria Math" panose="02040503050406030204" pitchFamily="18" charset="0"/>
+                                      </a:rPr>
+                                      <m:t>я</m:t>
+                                    </m:r>
+                                  </m:sub>
+                                </m:sSub>
+                                <m:r>
+                                  <a:rPr lang="en-US" sz="2800" b="0" i="1" smtClean="0">
+                                    <a:latin typeface="Cambria Math" panose="02040503050406030204" pitchFamily="18" charset="0"/>
+                                  </a:rPr>
+                                  <m:t>.                             </m:t>
+                                </m:r>
+                              </m:e>
+                            </m:mr>
+                          </m:m>
+                        </m:e>
+                      </m:d>
+                    </m:oMath>
+                  </m:oMathPara>
+                </a14:m>
+                <a:endParaRPr lang="ru-RU" sz="2800" dirty="0"/>
+              </a:p>
+            </p:txBody>
+          </p:sp>
+        </mc:Choice>
+        <mc:Fallback>
+          <p:sp>
+            <p:nvSpPr>
+              <p:cNvPr id="4" name="TextBox 3"/>
+              <p:cNvSpPr txBox="1">
+                <a:spLocks noRot="1" noChangeAspect="1" noMove="1" noResize="1" noEditPoints="1" noAdjustHandles="1" noChangeArrowheads="1" noChangeShapeType="1" noTextEdit="1"/>
+              </p:cNvSpPr>
+              <p:nvPr/>
+            </p:nvSpPr>
+            <p:spPr>
+              <a:xfrm>
+                <a:off x="1539551" y="1059488"/>
+                <a:ext cx="9509319" cy="2676245"/>
+              </a:xfrm>
+              <a:prstGeom prst="rect">
+                <a:avLst/>
+              </a:prstGeom>
+              <a:blipFill>
+                <a:blip r:embed="rId2"/>
+                <a:stretch>
+                  <a:fillRect/>
+                </a:stretch>
+              </a:blipFill>
+            </p:spPr>
+            <p:txBody>
+              <a:bodyPr/>
+              <a:lstStyle/>
+              <a:p>
+                <a:r>
+                  <a:rPr lang="ru-RU">
+                    <a:noFill/>
+                  </a:rPr>
+                  <a:t> </a:t>
+                </a:r>
+              </a:p>
+            </p:txBody>
+          </p:sp>
+        </mc:Fallback>
+      </mc:AlternateContent>
+      <p:pic>
+        <p:nvPicPr>
+          <p:cNvPr id="5" name="Рисунок 4"/>
+          <p:cNvPicPr>
+            <a:picLocks noChangeAspect="1"/>
+          </p:cNvPicPr>
+          <p:nvPr/>
+        </p:nvPicPr>
+        <p:blipFill>
+          <a:blip r:embed="rId3"/>
+          <a:stretch>
+            <a:fillRect/>
+          </a:stretch>
+        </p:blipFill>
+        <p:spPr>
+          <a:xfrm>
+            <a:off x="478209" y="4024982"/>
+            <a:ext cx="11381609" cy="2217197"/>
+          </a:xfrm>
+          <a:prstGeom prst="rect">
+            <a:avLst/>
+          </a:prstGeom>
+        </p:spPr>
+      </p:pic>
     </p:spTree>
     <p:extLst>
       <p:ext uri="{BB962C8B-B14F-4D97-AF65-F5344CB8AC3E}">
@@ -3765,8 +4781,16 @@
           <a:lstStyle/>
           <a:p>
             <a:r>
+              <a:rPr lang="ru-RU" dirty="0" smtClean="0"/>
+              <a:t>Передаточная функция </a:t>
+            </a:r>
+            <a:r>
+              <a:rPr lang="ru-RU" dirty="0" smtClean="0"/>
+              <a:t>двигателя </a:t>
+            </a:r>
+            <a:r>
               <a:rPr lang="ru-RU" dirty="0"/>
-              <a:t>Структурная схема двигателя постоянного тока</a:t>
+              <a:t>постоянного тока</a:t>
             </a:r>
           </a:p>
         </p:txBody>
@@ -3801,12 +4825,1558 @@
           </a:p>
         </p:txBody>
       </p:sp>
+      <mc:AlternateContent xmlns:mc="http://schemas.openxmlformats.org/markup-compatibility/2006">
+        <mc:Choice xmlns:a14="http://schemas.microsoft.com/office/drawing/2010/main" Requires="a14">
+          <p:sp>
+            <p:nvSpPr>
+              <p:cNvPr id="4" name="TextBox 3"/>
+              <p:cNvSpPr txBox="1"/>
+              <p:nvPr/>
+            </p:nvSpPr>
+            <p:spPr>
+              <a:xfrm>
+                <a:off x="1539551" y="1059488"/>
+                <a:ext cx="9509319" cy="2676245"/>
+              </a:xfrm>
+              <a:prstGeom prst="rect">
+                <a:avLst/>
+              </a:prstGeom>
+              <a:noFill/>
+            </p:spPr>
+            <p:txBody>
+              <a:bodyPr wrap="square" rtlCol="0">
+                <a:spAutoFit/>
+              </a:bodyPr>
+              <a:lstStyle/>
+              <a:p>
+                <a:pPr/>
+                <a14:m>
+                  <m:oMathPara xmlns:m="http://schemas.openxmlformats.org/officeDocument/2006/math">
+                    <m:oMathParaPr>
+                      <m:jc m:val="left"/>
+                    </m:oMathParaPr>
+                    <m:oMath xmlns:m="http://schemas.openxmlformats.org/officeDocument/2006/math">
+                      <m:d>
+                        <m:dPr>
+                          <m:begChr m:val="{"/>
+                          <m:endChr m:val=""/>
+                          <m:ctrlPr>
+                            <a:rPr lang="ru-RU" sz="2800" i="1" smtClean="0">
+                              <a:latin typeface="Cambria Math" panose="02040503050406030204" pitchFamily="18" charset="0"/>
+                            </a:rPr>
+                          </m:ctrlPr>
+                        </m:dPr>
+                        <m:e>
+                          <m:m>
+                            <m:mPr>
+                              <m:mcs>
+                                <m:mc>
+                                  <m:mcPr>
+                                    <m:count m:val="1"/>
+                                    <m:mcJc m:val="center"/>
+                                  </m:mcPr>
+                                </m:mc>
+                              </m:mcs>
+                              <m:ctrlPr>
+                                <a:rPr lang="ru-RU" sz="2800" i="1" smtClean="0">
+                                  <a:latin typeface="Cambria Math" panose="02040503050406030204" pitchFamily="18" charset="0"/>
+                                </a:rPr>
+                              </m:ctrlPr>
+                            </m:mPr>
+                            <m:mr>
+                              <m:e>
+                                <m:sSub>
+                                  <m:sSubPr>
+                                    <m:ctrlPr>
+                                      <a:rPr lang="ru-RU" sz="2800" i="1" smtClean="0">
+                                        <a:latin typeface="Cambria Math" panose="02040503050406030204" pitchFamily="18" charset="0"/>
+                                      </a:rPr>
+                                    </m:ctrlPr>
+                                  </m:sSubPr>
+                                  <m:e>
+                                    <m:r>
+                                      <a:rPr lang="en-US" sz="2800" b="0" i="1" smtClean="0">
+                                        <a:latin typeface="Cambria Math" panose="02040503050406030204" pitchFamily="18" charset="0"/>
+                                      </a:rPr>
+                                      <m:t>𝑈</m:t>
+                                    </m:r>
+                                  </m:e>
+                                  <m:sub>
+                                    <m:r>
+                                      <a:rPr lang="ru-RU" sz="2800" b="0" i="1" smtClean="0">
+                                        <a:latin typeface="Cambria Math" panose="02040503050406030204" pitchFamily="18" charset="0"/>
+                                      </a:rPr>
+                                      <m:t>я</m:t>
+                                    </m:r>
+                                  </m:sub>
+                                </m:sSub>
+                                <m:r>
+                                  <m:rPr>
+                                    <m:brk m:alnAt="7"/>
+                                  </m:rPr>
+                                  <a:rPr lang="ru-RU" sz="2800" b="0" i="1" smtClean="0">
+                                    <a:latin typeface="Cambria Math" panose="02040503050406030204" pitchFamily="18" charset="0"/>
+                                  </a:rPr>
+                                  <m:t>=</m:t>
+                                </m:r>
+                                <m:sSub>
+                                  <m:sSubPr>
+                                    <m:ctrlPr>
+                                      <a:rPr lang="ru-RU" sz="2800" b="0" i="1" smtClean="0">
+                                        <a:latin typeface="Cambria Math" panose="02040503050406030204" pitchFamily="18" charset="0"/>
+                                      </a:rPr>
+                                    </m:ctrlPr>
+                                  </m:sSubPr>
+                                  <m:e>
+                                    <m:r>
+                                      <a:rPr lang="en-US" sz="2800" b="0" i="1" smtClean="0">
+                                        <a:latin typeface="Cambria Math" panose="02040503050406030204" pitchFamily="18" charset="0"/>
+                                      </a:rPr>
+                                      <m:t>𝐿</m:t>
+                                    </m:r>
+                                  </m:e>
+                                  <m:sub>
+                                    <m:r>
+                                      <a:rPr lang="ru-RU" sz="2800" b="0" i="1" smtClean="0">
+                                        <a:latin typeface="Cambria Math" panose="02040503050406030204" pitchFamily="18" charset="0"/>
+                                      </a:rPr>
+                                      <m:t>я</m:t>
+                                    </m:r>
+                                  </m:sub>
+                                </m:sSub>
+                                <m:f>
+                                  <m:fPr>
+                                    <m:ctrlPr>
+                                      <a:rPr lang="ru-RU" sz="2800" b="0" i="1" smtClean="0">
+                                        <a:latin typeface="Cambria Math" panose="02040503050406030204" pitchFamily="18" charset="0"/>
+                                      </a:rPr>
+                                    </m:ctrlPr>
+                                  </m:fPr>
+                                  <m:num>
+                                    <m:r>
+                                      <a:rPr lang="en-US" sz="2800" b="0" i="1" smtClean="0">
+                                        <a:latin typeface="Cambria Math" panose="02040503050406030204" pitchFamily="18" charset="0"/>
+                                      </a:rPr>
+                                      <m:t>𝑑</m:t>
+                                    </m:r>
+                                    <m:sSub>
+                                      <m:sSubPr>
+                                        <m:ctrlPr>
+                                          <a:rPr lang="en-US" sz="2800" b="0" i="1" smtClean="0">
+                                            <a:latin typeface="Cambria Math" panose="02040503050406030204" pitchFamily="18" charset="0"/>
+                                          </a:rPr>
+                                        </m:ctrlPr>
+                                      </m:sSubPr>
+                                      <m:e>
+                                        <m:r>
+                                          <a:rPr lang="en-US" sz="2800" b="0" i="1" smtClean="0">
+                                            <a:latin typeface="Cambria Math" panose="02040503050406030204" pitchFamily="18" charset="0"/>
+                                          </a:rPr>
+                                          <m:t>𝑖</m:t>
+                                        </m:r>
+                                      </m:e>
+                                      <m:sub>
+                                        <m:r>
+                                          <a:rPr lang="ru-RU" sz="2800" b="0" i="1" smtClean="0">
+                                            <a:latin typeface="Cambria Math" panose="02040503050406030204" pitchFamily="18" charset="0"/>
+                                          </a:rPr>
+                                          <m:t>я</m:t>
+                                        </m:r>
+                                      </m:sub>
+                                    </m:sSub>
+                                  </m:num>
+                                  <m:den>
+                                    <m:r>
+                                      <a:rPr lang="en-US" sz="2800" b="0" i="1" smtClean="0">
+                                        <a:latin typeface="Cambria Math" panose="02040503050406030204" pitchFamily="18" charset="0"/>
+                                      </a:rPr>
+                                      <m:t>𝑑𝑡</m:t>
+                                    </m:r>
+                                  </m:den>
+                                </m:f>
+                                <m:r>
+                                  <m:rPr>
+                                    <m:brk m:alnAt="7"/>
+                                  </m:rPr>
+                                  <a:rPr lang="en-US" sz="2800" b="0" i="1" smtClean="0">
+                                    <a:latin typeface="Cambria Math" panose="02040503050406030204" pitchFamily="18" charset="0"/>
+                                  </a:rPr>
+                                  <m:t>+</m:t>
+                                </m:r>
+                                <m:sSub>
+                                  <m:sSubPr>
+                                    <m:ctrlPr>
+                                      <a:rPr lang="en-US" sz="2800" b="0" i="1" smtClean="0">
+                                        <a:latin typeface="Cambria Math" panose="02040503050406030204" pitchFamily="18" charset="0"/>
+                                      </a:rPr>
+                                    </m:ctrlPr>
+                                  </m:sSubPr>
+                                  <m:e>
+                                    <m:r>
+                                      <a:rPr lang="en-US" sz="2800" b="0" i="1" smtClean="0">
+                                        <a:latin typeface="Cambria Math" panose="02040503050406030204" pitchFamily="18" charset="0"/>
+                                      </a:rPr>
+                                      <m:t>𝑅</m:t>
+                                    </m:r>
+                                  </m:e>
+                                  <m:sub>
+                                    <m:r>
+                                      <a:rPr lang="ru-RU" sz="2800" b="0" i="1" smtClean="0">
+                                        <a:latin typeface="Cambria Math" panose="02040503050406030204" pitchFamily="18" charset="0"/>
+                                      </a:rPr>
+                                      <m:t>я</m:t>
+                                    </m:r>
+                                  </m:sub>
+                                </m:sSub>
+                                <m:sSub>
+                                  <m:sSubPr>
+                                    <m:ctrlPr>
+                                      <a:rPr lang="en-US" sz="2800" i="1">
+                                        <a:latin typeface="Cambria Math" panose="02040503050406030204" pitchFamily="18" charset="0"/>
+                                      </a:rPr>
+                                    </m:ctrlPr>
+                                  </m:sSubPr>
+                                  <m:e>
+                                    <m:r>
+                                      <a:rPr lang="en-US" sz="2800" i="1">
+                                        <a:latin typeface="Cambria Math" panose="02040503050406030204" pitchFamily="18" charset="0"/>
+                                      </a:rPr>
+                                      <m:t>𝑖</m:t>
+                                    </m:r>
+                                  </m:e>
+                                  <m:sub>
+                                    <m:r>
+                                      <a:rPr lang="ru-RU" sz="2800" i="1">
+                                        <a:latin typeface="Cambria Math" panose="02040503050406030204" pitchFamily="18" charset="0"/>
+                                      </a:rPr>
+                                      <m:t>я</m:t>
+                                    </m:r>
+                                  </m:sub>
+                                </m:sSub>
+                                <m:r>
+                                  <a:rPr lang="en-US" sz="2800" b="0" i="1" smtClean="0">
+                                    <a:latin typeface="Cambria Math" panose="02040503050406030204" pitchFamily="18" charset="0"/>
+                                  </a:rPr>
+                                  <m:t>+</m:t>
+                                </m:r>
+                                <m:sSub>
+                                  <m:sSubPr>
+                                    <m:ctrlPr>
+                                      <a:rPr lang="en-US" sz="2800" b="0" i="1" smtClean="0">
+                                        <a:latin typeface="Cambria Math" panose="02040503050406030204" pitchFamily="18" charset="0"/>
+                                      </a:rPr>
+                                    </m:ctrlPr>
+                                  </m:sSubPr>
+                                  <m:e>
+                                    <m:r>
+                                      <a:rPr lang="en-US" sz="2800" b="0" i="1" smtClean="0">
+                                        <a:latin typeface="Cambria Math" panose="02040503050406030204" pitchFamily="18" charset="0"/>
+                                      </a:rPr>
+                                      <m:t>𝑘</m:t>
+                                    </m:r>
+                                  </m:e>
+                                  <m:sub>
+                                    <m:r>
+                                      <m:rPr>
+                                        <m:sty m:val="p"/>
+                                      </m:rPr>
+                                      <a:rPr lang="el-GR" sz="2800" b="0" i="1" smtClean="0">
+                                        <a:latin typeface="Cambria Math" panose="02040503050406030204" pitchFamily="18" charset="0"/>
+                                        <a:ea typeface="Cambria Math" panose="02040503050406030204" pitchFamily="18" charset="0"/>
+                                      </a:rPr>
+                                      <m:t>Ω</m:t>
+                                    </m:r>
+                                  </m:sub>
+                                </m:sSub>
+                                <m:sSub>
+                                  <m:sSubPr>
+                                    <m:ctrlPr>
+                                      <a:rPr lang="en-US" sz="2800" b="0" i="1" smtClean="0">
+                                        <a:latin typeface="Cambria Math" panose="02040503050406030204" pitchFamily="18" charset="0"/>
+                                      </a:rPr>
+                                    </m:ctrlPr>
+                                  </m:sSubPr>
+                                  <m:e>
+                                    <m:r>
+                                      <m:rPr>
+                                        <m:sty m:val="p"/>
+                                      </m:rPr>
+                                      <a:rPr lang="el-GR" sz="2800" b="0" i="1" smtClean="0">
+                                        <a:latin typeface="Cambria Math" panose="02040503050406030204" pitchFamily="18" charset="0"/>
+                                        <a:ea typeface="Cambria Math" panose="02040503050406030204" pitchFamily="18" charset="0"/>
+                                      </a:rPr>
+                                      <m:t>Ω</m:t>
+                                    </m:r>
+                                  </m:e>
+                                  <m:sub>
+                                    <m:r>
+                                      <a:rPr lang="ru-RU" sz="2800" b="0" i="1" smtClean="0">
+                                        <a:latin typeface="Cambria Math" panose="02040503050406030204" pitchFamily="18" charset="0"/>
+                                      </a:rPr>
+                                      <m:t>д</m:t>
+                                    </m:r>
+                                  </m:sub>
+                                </m:sSub>
+                                <m:r>
+                                  <a:rPr lang="ru-RU" sz="2800" b="0" i="1" smtClean="0">
+                                    <a:latin typeface="Cambria Math" panose="02040503050406030204" pitchFamily="18" charset="0"/>
+                                  </a:rPr>
+                                  <m:t>;</m:t>
+                                </m:r>
+                              </m:e>
+                            </m:mr>
+                            <m:mr>
+                              <m:e>
+                                <m:m>
+                                  <m:mPr>
+                                    <m:mcs>
+                                      <m:mc>
+                                        <m:mcPr>
+                                          <m:count m:val="1"/>
+                                          <m:mcJc m:val="center"/>
+                                        </m:mcPr>
+                                      </m:mc>
+                                    </m:mcs>
+                                    <m:ctrlPr>
+                                      <a:rPr lang="ru-RU" sz="2800" i="1" smtClean="0">
+                                        <a:latin typeface="Cambria Math" panose="02040503050406030204" pitchFamily="18" charset="0"/>
+                                      </a:rPr>
+                                    </m:ctrlPr>
+                                  </m:mPr>
+                                  <m:mr>
+                                    <m:e>
+                                      <m:sSub>
+                                        <m:sSubPr>
+                                          <m:ctrlPr>
+                                            <a:rPr lang="ru-RU" sz="2800" i="1" smtClean="0">
+                                              <a:latin typeface="Cambria Math" panose="02040503050406030204" pitchFamily="18" charset="0"/>
+                                            </a:rPr>
+                                          </m:ctrlPr>
+                                        </m:sSubPr>
+                                        <m:e>
+                                          <m:r>
+                                            <a:rPr lang="en-US" sz="2800" b="0" i="1" smtClean="0">
+                                              <a:latin typeface="Cambria Math" panose="02040503050406030204" pitchFamily="18" charset="0"/>
+                                            </a:rPr>
+                                            <m:t>𝐽</m:t>
+                                          </m:r>
+                                        </m:e>
+                                        <m:sub>
+                                          <m:r>
+                                            <m:rPr>
+                                              <m:sty m:val="p"/>
+                                            </m:rPr>
+                                            <a:rPr lang="el-GR" sz="2800" i="1" smtClean="0">
+                                              <a:latin typeface="Cambria Math" panose="02040503050406030204" pitchFamily="18" charset="0"/>
+                                              <a:ea typeface="Cambria Math" panose="02040503050406030204" pitchFamily="18" charset="0"/>
+                                            </a:rPr>
+                                            <m:t>Σ</m:t>
+                                          </m:r>
+                                        </m:sub>
+                                      </m:sSub>
+                                      <m:f>
+                                        <m:fPr>
+                                          <m:ctrlPr>
+                                            <a:rPr lang="ru-RU" sz="2800" i="1" smtClean="0">
+                                              <a:latin typeface="Cambria Math" panose="02040503050406030204" pitchFamily="18" charset="0"/>
+                                            </a:rPr>
+                                          </m:ctrlPr>
+                                        </m:fPr>
+                                        <m:num>
+                                          <m:r>
+                                            <a:rPr lang="en-US" sz="2800" b="0" i="1" smtClean="0">
+                                              <a:latin typeface="Cambria Math" panose="02040503050406030204" pitchFamily="18" charset="0"/>
+                                            </a:rPr>
+                                            <m:t>𝑑</m:t>
+                                          </m:r>
+                                          <m:sSub>
+                                            <m:sSubPr>
+                                              <m:ctrlPr>
+                                                <a:rPr lang="en-US" sz="2800" i="1">
+                                                  <a:latin typeface="Cambria Math" panose="02040503050406030204" pitchFamily="18" charset="0"/>
+                                                </a:rPr>
+                                              </m:ctrlPr>
+                                            </m:sSubPr>
+                                            <m:e>
+                                              <m:r>
+                                                <m:rPr>
+                                                  <m:sty m:val="p"/>
+                                                </m:rPr>
+                                                <a:rPr lang="el-GR" sz="2800" i="1">
+                                                  <a:latin typeface="Cambria Math" panose="02040503050406030204" pitchFamily="18" charset="0"/>
+                                                  <a:ea typeface="Cambria Math" panose="02040503050406030204" pitchFamily="18" charset="0"/>
+                                                </a:rPr>
+                                                <m:t>Ω</m:t>
+                                              </m:r>
+                                            </m:e>
+                                            <m:sub>
+                                              <m:r>
+                                                <a:rPr lang="ru-RU" sz="2800" i="1">
+                                                  <a:latin typeface="Cambria Math" panose="02040503050406030204" pitchFamily="18" charset="0"/>
+                                                </a:rPr>
+                                                <m:t>д</m:t>
+                                              </m:r>
+                                            </m:sub>
+                                          </m:sSub>
+                                        </m:num>
+                                        <m:den>
+                                          <m:r>
+                                            <a:rPr lang="en-US" sz="2800" b="0" i="1" smtClean="0">
+                                              <a:latin typeface="Cambria Math" panose="02040503050406030204" pitchFamily="18" charset="0"/>
+                                            </a:rPr>
+                                            <m:t>𝑑𝑡</m:t>
+                                          </m:r>
+                                        </m:den>
+                                      </m:f>
+                                      <m:r>
+                                        <m:rPr>
+                                          <m:brk m:alnAt="7"/>
+                                        </m:rPr>
+                                        <a:rPr lang="en-US" sz="2800" b="0" i="1" smtClean="0">
+                                          <a:latin typeface="Cambria Math" panose="02040503050406030204" pitchFamily="18" charset="0"/>
+                                        </a:rPr>
+                                        <m:t>=</m:t>
+                                      </m:r>
+                                      <m:sSub>
+                                        <m:sSubPr>
+                                          <m:ctrlPr>
+                                            <a:rPr lang="en-US" sz="2800" b="0" i="1" smtClean="0">
+                                              <a:latin typeface="Cambria Math" panose="02040503050406030204" pitchFamily="18" charset="0"/>
+                                            </a:rPr>
+                                          </m:ctrlPr>
+                                        </m:sSubPr>
+                                        <m:e>
+                                          <m:r>
+                                            <a:rPr lang="en-US" sz="2800" b="0" i="1" smtClean="0">
+                                              <a:latin typeface="Cambria Math" panose="02040503050406030204" pitchFamily="18" charset="0"/>
+                                            </a:rPr>
+                                            <m:t>𝑀</m:t>
+                                          </m:r>
+                                        </m:e>
+                                        <m:sub>
+                                          <m:r>
+                                            <a:rPr lang="ru-RU" sz="2800" b="0" i="1" smtClean="0">
+                                              <a:latin typeface="Cambria Math" panose="02040503050406030204" pitchFamily="18" charset="0"/>
+                                            </a:rPr>
+                                            <m:t>д</m:t>
+                                          </m:r>
+                                        </m:sub>
+                                      </m:sSub>
+                                      <m:r>
+                                        <m:rPr>
+                                          <m:brk m:alnAt="7"/>
+                                        </m:rPr>
+                                        <a:rPr lang="ru-RU" sz="2800" b="0" i="1" smtClean="0">
+                                          <a:latin typeface="Cambria Math" panose="02040503050406030204" pitchFamily="18" charset="0"/>
+                                        </a:rPr>
+                                        <m:t>;                           </m:t>
+                                      </m:r>
+                                    </m:e>
+                                  </m:mr>
+                                  <m:mr>
+                                    <m:e>
+                                      <m:sSub>
+                                        <m:sSubPr>
+                                          <m:ctrlPr>
+                                            <a:rPr lang="ru-RU" sz="2800" i="1">
+                                              <a:latin typeface="Cambria Math" panose="02040503050406030204" pitchFamily="18" charset="0"/>
+                                            </a:rPr>
+                                          </m:ctrlPr>
+                                        </m:sSubPr>
+                                        <m:e>
+                                          <m:r>
+                                            <a:rPr lang="en-US" sz="2800" i="1">
+                                              <a:latin typeface="Cambria Math" panose="02040503050406030204" pitchFamily="18" charset="0"/>
+                                            </a:rPr>
+                                            <m:t>𝐽</m:t>
+                                          </m:r>
+                                        </m:e>
+                                        <m:sub>
+                                          <m:r>
+                                            <m:rPr>
+                                              <m:sty m:val="p"/>
+                                            </m:rPr>
+                                            <a:rPr lang="el-GR" sz="2800" i="1">
+                                              <a:latin typeface="Cambria Math" panose="02040503050406030204" pitchFamily="18" charset="0"/>
+                                              <a:ea typeface="Cambria Math" panose="02040503050406030204" pitchFamily="18" charset="0"/>
+                                            </a:rPr>
+                                            <m:t>Σ</m:t>
+                                          </m:r>
+                                        </m:sub>
+                                      </m:sSub>
+                                      <m:f>
+                                        <m:fPr>
+                                          <m:ctrlPr>
+                                            <a:rPr lang="ru-RU" sz="2800" i="1">
+                                              <a:latin typeface="Cambria Math" panose="02040503050406030204" pitchFamily="18" charset="0"/>
+                                            </a:rPr>
+                                          </m:ctrlPr>
+                                        </m:fPr>
+                                        <m:num>
+                                          <m:r>
+                                            <a:rPr lang="en-US" sz="2800" i="1">
+                                              <a:latin typeface="Cambria Math" panose="02040503050406030204" pitchFamily="18" charset="0"/>
+                                            </a:rPr>
+                                            <m:t>𝑑</m:t>
+                                          </m:r>
+                                          <m:sSub>
+                                            <m:sSubPr>
+                                              <m:ctrlPr>
+                                                <a:rPr lang="en-US" sz="2800" i="1">
+                                                  <a:latin typeface="Cambria Math" panose="02040503050406030204" pitchFamily="18" charset="0"/>
+                                                </a:rPr>
+                                              </m:ctrlPr>
+                                            </m:sSubPr>
+                                            <m:e>
+                                              <m:r>
+                                                <m:rPr>
+                                                  <m:sty m:val="p"/>
+                                                </m:rPr>
+                                                <a:rPr lang="el-GR" sz="2800" i="1">
+                                                  <a:latin typeface="Cambria Math" panose="02040503050406030204" pitchFamily="18" charset="0"/>
+                                                  <a:ea typeface="Cambria Math" panose="02040503050406030204" pitchFamily="18" charset="0"/>
+                                                </a:rPr>
+                                                <m:t>Ω</m:t>
+                                              </m:r>
+                                            </m:e>
+                                            <m:sub>
+                                              <m:r>
+                                                <a:rPr lang="ru-RU" sz="2800" i="1">
+                                                  <a:latin typeface="Cambria Math" panose="02040503050406030204" pitchFamily="18" charset="0"/>
+                                                </a:rPr>
+                                                <m:t>д</m:t>
+                                              </m:r>
+                                            </m:sub>
+                                          </m:sSub>
+                                        </m:num>
+                                        <m:den>
+                                          <m:r>
+                                            <a:rPr lang="en-US" sz="2800" i="1">
+                                              <a:latin typeface="Cambria Math" panose="02040503050406030204" pitchFamily="18" charset="0"/>
+                                            </a:rPr>
+                                            <m:t>𝑑𝑡</m:t>
+                                          </m:r>
+                                        </m:den>
+                                      </m:f>
+                                      <m:r>
+                                        <m:rPr>
+                                          <m:brk m:alnAt="7"/>
+                                        </m:rPr>
+                                        <a:rPr lang="en-US" sz="2800" i="1">
+                                          <a:latin typeface="Cambria Math" panose="02040503050406030204" pitchFamily="18" charset="0"/>
+                                        </a:rPr>
+                                        <m:t>=</m:t>
+                                      </m:r>
+                                      <m:sSub>
+                                        <m:sSubPr>
+                                          <m:ctrlPr>
+                                            <a:rPr lang="en-US" sz="2800" i="1" smtClean="0">
+                                              <a:latin typeface="Cambria Math" panose="02040503050406030204" pitchFamily="18" charset="0"/>
+                                            </a:rPr>
+                                          </m:ctrlPr>
+                                        </m:sSubPr>
+                                        <m:e>
+                                          <m:r>
+                                            <a:rPr lang="en-US" sz="2800" b="0" i="1" smtClean="0">
+                                              <a:latin typeface="Cambria Math" panose="02040503050406030204" pitchFamily="18" charset="0"/>
+                                            </a:rPr>
+                                            <m:t>𝑘</m:t>
+                                          </m:r>
+                                        </m:e>
+                                        <m:sub>
+                                          <m:r>
+                                            <a:rPr lang="ru-RU" sz="2800" b="0" i="1" smtClean="0">
+                                              <a:latin typeface="Cambria Math" panose="02040503050406030204" pitchFamily="18" charset="0"/>
+                                            </a:rPr>
+                                            <m:t>м</m:t>
+                                          </m:r>
+                                        </m:sub>
+                                      </m:sSub>
+                                      <m:sSub>
+                                        <m:sSubPr>
+                                          <m:ctrlPr>
+                                            <a:rPr lang="en-US" sz="2800" i="1">
+                                              <a:latin typeface="Cambria Math" panose="02040503050406030204" pitchFamily="18" charset="0"/>
+                                            </a:rPr>
+                                          </m:ctrlPr>
+                                        </m:sSubPr>
+                                        <m:e>
+                                          <m:r>
+                                            <a:rPr lang="en-US" sz="2800" i="1">
+                                              <a:latin typeface="Cambria Math" panose="02040503050406030204" pitchFamily="18" charset="0"/>
+                                            </a:rPr>
+                                            <m:t>𝑖</m:t>
+                                          </m:r>
+                                        </m:e>
+                                        <m:sub>
+                                          <m:r>
+                                            <a:rPr lang="ru-RU" sz="2800" i="1">
+                                              <a:latin typeface="Cambria Math" panose="02040503050406030204" pitchFamily="18" charset="0"/>
+                                            </a:rPr>
+                                            <m:t>я</m:t>
+                                          </m:r>
+                                        </m:sub>
+                                      </m:sSub>
+                                      <m:r>
+                                        <a:rPr lang="ru-RU" sz="2800" b="0" i="1" smtClean="0">
+                                          <a:latin typeface="Cambria Math" panose="02040503050406030204" pitchFamily="18" charset="0"/>
+                                        </a:rPr>
+                                        <m:t>,                           </m:t>
+                                      </m:r>
+                                    </m:e>
+                                  </m:mr>
+                                </m:m>
+                              </m:e>
+                            </m:mr>
+                          </m:m>
+                          <m:r>
+                            <a:rPr lang="ru-RU" sz="2800" b="0" i="1" smtClean="0">
+                              <a:latin typeface="Cambria Math" panose="02040503050406030204" pitchFamily="18" charset="0"/>
+                            </a:rPr>
+                            <m:t>⇒</m:t>
+                          </m:r>
+                          <m:r>
+                            <a:rPr lang="en-US" sz="2800" b="0" i="1" smtClean="0">
+                              <a:latin typeface="Cambria Math" panose="02040503050406030204" pitchFamily="18" charset="0"/>
+                            </a:rPr>
+                            <m:t> </m:t>
+                          </m:r>
+                        </m:e>
+                      </m:d>
+                      <m:d>
+                        <m:dPr>
+                          <m:begChr m:val="{"/>
+                          <m:endChr m:val=""/>
+                          <m:ctrlPr>
+                            <a:rPr lang="ru-RU" sz="2800" i="1" smtClean="0">
+                              <a:latin typeface="Cambria Math" panose="02040503050406030204" pitchFamily="18" charset="0"/>
+                            </a:rPr>
+                          </m:ctrlPr>
+                        </m:dPr>
+                        <m:e>
+                          <m:m>
+                            <m:mPr>
+                              <m:mcs>
+                                <m:mc>
+                                  <m:mcPr>
+                                    <m:count m:val="1"/>
+                                    <m:mcJc m:val="center"/>
+                                  </m:mcPr>
+                                </m:mc>
+                              </m:mcs>
+                              <m:ctrlPr>
+                                <a:rPr lang="ru-RU" sz="2800" i="1" smtClean="0">
+                                  <a:latin typeface="Cambria Math" panose="02040503050406030204" pitchFamily="18" charset="0"/>
+                                </a:rPr>
+                              </m:ctrlPr>
+                            </m:mPr>
+                            <m:mr>
+                              <m:e>
+                                <m:sSub>
+                                  <m:sSubPr>
+                                    <m:ctrlPr>
+                                      <a:rPr lang="ru-RU" sz="2800" i="1">
+                                        <a:latin typeface="Cambria Math" panose="02040503050406030204" pitchFamily="18" charset="0"/>
+                                      </a:rPr>
+                                    </m:ctrlPr>
+                                  </m:sSubPr>
+                                  <m:e>
+                                    <m:r>
+                                      <a:rPr lang="en-US" sz="2800" i="1">
+                                        <a:latin typeface="Cambria Math" panose="02040503050406030204" pitchFamily="18" charset="0"/>
+                                      </a:rPr>
+                                      <m:t>𝑈</m:t>
+                                    </m:r>
+                                  </m:e>
+                                  <m:sub>
+                                    <m:r>
+                                      <a:rPr lang="ru-RU" sz="2800" i="1">
+                                        <a:latin typeface="Cambria Math" panose="02040503050406030204" pitchFamily="18" charset="0"/>
+                                      </a:rPr>
+                                      <m:t>я</m:t>
+                                    </m:r>
+                                  </m:sub>
+                                </m:sSub>
+                                <m:r>
+                                  <a:rPr lang="ru-RU" sz="2800" b="0" i="1" smtClean="0">
+                                    <a:latin typeface="Cambria Math" panose="02040503050406030204" pitchFamily="18" charset="0"/>
+                                  </a:rPr>
+                                  <m:t>=</m:t>
+                                </m:r>
+                                <m:sSub>
+                                  <m:sSubPr>
+                                    <m:ctrlPr>
+                                      <a:rPr lang="ru-RU" sz="2800" i="1">
+                                        <a:latin typeface="Cambria Math" panose="02040503050406030204" pitchFamily="18" charset="0"/>
+                                      </a:rPr>
+                                    </m:ctrlPr>
+                                  </m:sSubPr>
+                                  <m:e>
+                                    <m:r>
+                                      <a:rPr lang="en-US" sz="2800" i="1">
+                                        <a:latin typeface="Cambria Math" panose="02040503050406030204" pitchFamily="18" charset="0"/>
+                                      </a:rPr>
+                                      <m:t>𝐿</m:t>
+                                    </m:r>
+                                  </m:e>
+                                  <m:sub>
+                                    <m:r>
+                                      <a:rPr lang="ru-RU" sz="2800" i="1">
+                                        <a:latin typeface="Cambria Math" panose="02040503050406030204" pitchFamily="18" charset="0"/>
+                                      </a:rPr>
+                                      <m:t>я</m:t>
+                                    </m:r>
+                                  </m:sub>
+                                </m:sSub>
+                                <m:f>
+                                  <m:fPr>
+                                    <m:ctrlPr>
+                                      <a:rPr lang="ru-RU" sz="2800" i="1">
+                                        <a:latin typeface="Cambria Math" panose="02040503050406030204" pitchFamily="18" charset="0"/>
+                                      </a:rPr>
+                                    </m:ctrlPr>
+                                  </m:fPr>
+                                  <m:num>
+                                    <m:r>
+                                      <a:rPr lang="en-US" sz="2800" i="1">
+                                        <a:latin typeface="Cambria Math" panose="02040503050406030204" pitchFamily="18" charset="0"/>
+                                      </a:rPr>
+                                      <m:t>𝑑</m:t>
+                                    </m:r>
+                                    <m:sSub>
+                                      <m:sSubPr>
+                                        <m:ctrlPr>
+                                          <a:rPr lang="en-US" sz="2800" i="1">
+                                            <a:latin typeface="Cambria Math" panose="02040503050406030204" pitchFamily="18" charset="0"/>
+                                          </a:rPr>
+                                        </m:ctrlPr>
+                                      </m:sSubPr>
+                                      <m:e>
+                                        <m:r>
+                                          <a:rPr lang="en-US" sz="2800" i="1">
+                                            <a:latin typeface="Cambria Math" panose="02040503050406030204" pitchFamily="18" charset="0"/>
+                                          </a:rPr>
+                                          <m:t>𝑖</m:t>
+                                        </m:r>
+                                      </m:e>
+                                      <m:sub>
+                                        <m:r>
+                                          <a:rPr lang="ru-RU" sz="2800" i="1">
+                                            <a:latin typeface="Cambria Math" panose="02040503050406030204" pitchFamily="18" charset="0"/>
+                                          </a:rPr>
+                                          <m:t>я</m:t>
+                                        </m:r>
+                                      </m:sub>
+                                    </m:sSub>
+                                  </m:num>
+                                  <m:den>
+                                    <m:r>
+                                      <a:rPr lang="en-US" sz="2800" i="1">
+                                        <a:latin typeface="Cambria Math" panose="02040503050406030204" pitchFamily="18" charset="0"/>
+                                      </a:rPr>
+                                      <m:t>𝑑𝑡</m:t>
+                                    </m:r>
+                                  </m:den>
+                                </m:f>
+                                <m:r>
+                                  <m:rPr>
+                                    <m:brk m:alnAt="7"/>
+                                  </m:rPr>
+                                  <a:rPr lang="en-US" sz="2800" i="1">
+                                    <a:latin typeface="Cambria Math" panose="02040503050406030204" pitchFamily="18" charset="0"/>
+                                  </a:rPr>
+                                  <m:t>+</m:t>
+                                </m:r>
+                                <m:sSub>
+                                  <m:sSubPr>
+                                    <m:ctrlPr>
+                                      <a:rPr lang="en-US" sz="2800" i="1">
+                                        <a:latin typeface="Cambria Math" panose="02040503050406030204" pitchFamily="18" charset="0"/>
+                                      </a:rPr>
+                                    </m:ctrlPr>
+                                  </m:sSubPr>
+                                  <m:e>
+                                    <m:r>
+                                      <a:rPr lang="en-US" sz="2800" i="1">
+                                        <a:latin typeface="Cambria Math" panose="02040503050406030204" pitchFamily="18" charset="0"/>
+                                      </a:rPr>
+                                      <m:t>𝑅</m:t>
+                                    </m:r>
+                                  </m:e>
+                                  <m:sub>
+                                    <m:r>
+                                      <a:rPr lang="ru-RU" sz="2800" i="1">
+                                        <a:latin typeface="Cambria Math" panose="02040503050406030204" pitchFamily="18" charset="0"/>
+                                      </a:rPr>
+                                      <m:t>я</m:t>
+                                    </m:r>
+                                  </m:sub>
+                                </m:sSub>
+                                <m:sSub>
+                                  <m:sSubPr>
+                                    <m:ctrlPr>
+                                      <a:rPr lang="en-US" sz="2800" i="1">
+                                        <a:latin typeface="Cambria Math" panose="02040503050406030204" pitchFamily="18" charset="0"/>
+                                      </a:rPr>
+                                    </m:ctrlPr>
+                                  </m:sSubPr>
+                                  <m:e>
+                                    <m:r>
+                                      <a:rPr lang="en-US" sz="2800" i="1">
+                                        <a:latin typeface="Cambria Math" panose="02040503050406030204" pitchFamily="18" charset="0"/>
+                                      </a:rPr>
+                                      <m:t>𝑖</m:t>
+                                    </m:r>
+                                  </m:e>
+                                  <m:sub>
+                                    <m:r>
+                                      <a:rPr lang="ru-RU" sz="2800" i="1">
+                                        <a:latin typeface="Cambria Math" panose="02040503050406030204" pitchFamily="18" charset="0"/>
+                                      </a:rPr>
+                                      <m:t>я</m:t>
+                                    </m:r>
+                                  </m:sub>
+                                </m:sSub>
+                                <m:r>
+                                  <a:rPr lang="en-US" sz="2800" i="1">
+                                    <a:latin typeface="Cambria Math" panose="02040503050406030204" pitchFamily="18" charset="0"/>
+                                  </a:rPr>
+                                  <m:t>+</m:t>
+                                </m:r>
+                                <m:sSub>
+                                  <m:sSubPr>
+                                    <m:ctrlPr>
+                                      <a:rPr lang="en-US" sz="2800" i="1">
+                                        <a:latin typeface="Cambria Math" panose="02040503050406030204" pitchFamily="18" charset="0"/>
+                                      </a:rPr>
+                                    </m:ctrlPr>
+                                  </m:sSubPr>
+                                  <m:e>
+                                    <m:r>
+                                      <a:rPr lang="en-US" sz="2800" i="1">
+                                        <a:latin typeface="Cambria Math" panose="02040503050406030204" pitchFamily="18" charset="0"/>
+                                      </a:rPr>
+                                      <m:t>𝑘</m:t>
+                                    </m:r>
+                                  </m:e>
+                                  <m:sub>
+                                    <m:r>
+                                      <m:rPr>
+                                        <m:sty m:val="p"/>
+                                      </m:rPr>
+                                      <a:rPr lang="el-GR" sz="2800" i="1">
+                                        <a:latin typeface="Cambria Math" panose="02040503050406030204" pitchFamily="18" charset="0"/>
+                                        <a:ea typeface="Cambria Math" panose="02040503050406030204" pitchFamily="18" charset="0"/>
+                                      </a:rPr>
+                                      <m:t>Ω</m:t>
+                                    </m:r>
+                                  </m:sub>
+                                </m:sSub>
+                                <m:sSub>
+                                  <m:sSubPr>
+                                    <m:ctrlPr>
+                                      <a:rPr lang="en-US" sz="2800" i="1">
+                                        <a:latin typeface="Cambria Math" panose="02040503050406030204" pitchFamily="18" charset="0"/>
+                                      </a:rPr>
+                                    </m:ctrlPr>
+                                  </m:sSubPr>
+                                  <m:e>
+                                    <m:r>
+                                      <m:rPr>
+                                        <m:sty m:val="p"/>
+                                      </m:rPr>
+                                      <a:rPr lang="el-GR" sz="2800" i="1">
+                                        <a:latin typeface="Cambria Math" panose="02040503050406030204" pitchFamily="18" charset="0"/>
+                                        <a:ea typeface="Cambria Math" panose="02040503050406030204" pitchFamily="18" charset="0"/>
+                                      </a:rPr>
+                                      <m:t>Ω</m:t>
+                                    </m:r>
+                                  </m:e>
+                                  <m:sub>
+                                    <m:r>
+                                      <a:rPr lang="ru-RU" sz="2800" i="1">
+                                        <a:latin typeface="Cambria Math" panose="02040503050406030204" pitchFamily="18" charset="0"/>
+                                      </a:rPr>
+                                      <m:t>д</m:t>
+                                    </m:r>
+                                  </m:sub>
+                                </m:sSub>
+                                <m:r>
+                                  <a:rPr lang="en-US" sz="2800" b="0" i="1" smtClean="0">
+                                    <a:latin typeface="Cambria Math" panose="02040503050406030204" pitchFamily="18" charset="0"/>
+                                  </a:rPr>
+                                  <m:t>;</m:t>
+                                </m:r>
+                              </m:e>
+                            </m:mr>
+                            <m:mr>
+                              <m:e>
+                                <m:sSub>
+                                  <m:sSubPr>
+                                    <m:ctrlPr>
+                                      <a:rPr lang="en-US" sz="2800" i="1">
+                                        <a:latin typeface="Cambria Math" panose="02040503050406030204" pitchFamily="18" charset="0"/>
+                                      </a:rPr>
+                                    </m:ctrlPr>
+                                  </m:sSubPr>
+                                  <m:e>
+                                    <m:r>
+                                      <a:rPr lang="en-US" sz="2800" i="1">
+                                        <a:latin typeface="Cambria Math" panose="02040503050406030204" pitchFamily="18" charset="0"/>
+                                      </a:rPr>
+                                      <m:t>𝑖</m:t>
+                                    </m:r>
+                                  </m:e>
+                                  <m:sub>
+                                    <m:r>
+                                      <a:rPr lang="ru-RU" sz="2800" i="1">
+                                        <a:latin typeface="Cambria Math" panose="02040503050406030204" pitchFamily="18" charset="0"/>
+                                      </a:rPr>
+                                      <m:t>я</m:t>
+                                    </m:r>
+                                  </m:sub>
+                                </m:sSub>
+                                <m:r>
+                                  <a:rPr lang="ru-RU" sz="2800" b="0" i="1" smtClean="0">
+                                    <a:latin typeface="Cambria Math" panose="02040503050406030204" pitchFamily="18" charset="0"/>
+                                  </a:rPr>
+                                  <m:t>=</m:t>
+                                </m:r>
+                                <m:f>
+                                  <m:fPr>
+                                    <m:ctrlPr>
+                                      <a:rPr lang="ru-RU" sz="2800" b="0" i="1" smtClean="0">
+                                        <a:latin typeface="Cambria Math" panose="02040503050406030204" pitchFamily="18" charset="0"/>
+                                      </a:rPr>
+                                    </m:ctrlPr>
+                                  </m:fPr>
+                                  <m:num>
+                                    <m:sSub>
+                                      <m:sSubPr>
+                                        <m:ctrlPr>
+                                          <a:rPr lang="ru-RU" sz="2800" i="1">
+                                            <a:latin typeface="Cambria Math" panose="02040503050406030204" pitchFamily="18" charset="0"/>
+                                          </a:rPr>
+                                        </m:ctrlPr>
+                                      </m:sSubPr>
+                                      <m:e>
+                                        <m:r>
+                                          <a:rPr lang="en-US" sz="2800" i="1">
+                                            <a:latin typeface="Cambria Math" panose="02040503050406030204" pitchFamily="18" charset="0"/>
+                                          </a:rPr>
+                                          <m:t>𝐽</m:t>
+                                        </m:r>
+                                      </m:e>
+                                      <m:sub>
+                                        <m:r>
+                                          <m:rPr>
+                                            <m:sty m:val="p"/>
+                                          </m:rPr>
+                                          <a:rPr lang="el-GR" sz="2800" i="1">
+                                            <a:latin typeface="Cambria Math" panose="02040503050406030204" pitchFamily="18" charset="0"/>
+                                            <a:ea typeface="Cambria Math" panose="02040503050406030204" pitchFamily="18" charset="0"/>
+                                          </a:rPr>
+                                          <m:t>Σ</m:t>
+                                        </m:r>
+                                      </m:sub>
+                                    </m:sSub>
+                                  </m:num>
+                                  <m:den>
+                                    <m:sSub>
+                                      <m:sSubPr>
+                                        <m:ctrlPr>
+                                          <a:rPr lang="ru-RU" sz="2800" b="0" i="1" smtClean="0">
+                                            <a:latin typeface="Cambria Math" panose="02040503050406030204" pitchFamily="18" charset="0"/>
+                                          </a:rPr>
+                                        </m:ctrlPr>
+                                      </m:sSubPr>
+                                      <m:e>
+                                        <m:r>
+                                          <a:rPr lang="en-US" sz="2800" b="0" i="1" smtClean="0">
+                                            <a:latin typeface="Cambria Math" panose="02040503050406030204" pitchFamily="18" charset="0"/>
+                                          </a:rPr>
+                                          <m:t>𝑘</m:t>
+                                        </m:r>
+                                      </m:e>
+                                      <m:sub>
+                                        <m:r>
+                                          <a:rPr lang="ru-RU" sz="2800" b="0" i="1" smtClean="0">
+                                            <a:latin typeface="Cambria Math" panose="02040503050406030204" pitchFamily="18" charset="0"/>
+                                          </a:rPr>
+                                          <m:t>м</m:t>
+                                        </m:r>
+                                      </m:sub>
+                                    </m:sSub>
+                                  </m:den>
+                                </m:f>
+                                <m:f>
+                                  <m:fPr>
+                                    <m:ctrlPr>
+                                      <a:rPr lang="ru-RU" sz="2800" i="1">
+                                        <a:latin typeface="Cambria Math" panose="02040503050406030204" pitchFamily="18" charset="0"/>
+                                      </a:rPr>
+                                    </m:ctrlPr>
+                                  </m:fPr>
+                                  <m:num>
+                                    <m:r>
+                                      <a:rPr lang="en-US" sz="2800" i="1">
+                                        <a:latin typeface="Cambria Math" panose="02040503050406030204" pitchFamily="18" charset="0"/>
+                                      </a:rPr>
+                                      <m:t>𝑑</m:t>
+                                    </m:r>
+                                    <m:sSub>
+                                      <m:sSubPr>
+                                        <m:ctrlPr>
+                                          <a:rPr lang="en-US" sz="2800" i="1">
+                                            <a:latin typeface="Cambria Math" panose="02040503050406030204" pitchFamily="18" charset="0"/>
+                                          </a:rPr>
+                                        </m:ctrlPr>
+                                      </m:sSubPr>
+                                      <m:e>
+                                        <m:r>
+                                          <m:rPr>
+                                            <m:sty m:val="p"/>
+                                          </m:rPr>
+                                          <a:rPr lang="el-GR" sz="2800" i="1">
+                                            <a:latin typeface="Cambria Math" panose="02040503050406030204" pitchFamily="18" charset="0"/>
+                                            <a:ea typeface="Cambria Math" panose="02040503050406030204" pitchFamily="18" charset="0"/>
+                                          </a:rPr>
+                                          <m:t>Ω</m:t>
+                                        </m:r>
+                                      </m:e>
+                                      <m:sub>
+                                        <m:r>
+                                          <a:rPr lang="ru-RU" sz="2800" i="1">
+                                            <a:latin typeface="Cambria Math" panose="02040503050406030204" pitchFamily="18" charset="0"/>
+                                          </a:rPr>
+                                          <m:t>д</m:t>
+                                        </m:r>
+                                      </m:sub>
+                                    </m:sSub>
+                                  </m:num>
+                                  <m:den>
+                                    <m:r>
+                                      <a:rPr lang="en-US" sz="2800" i="1">
+                                        <a:latin typeface="Cambria Math" panose="02040503050406030204" pitchFamily="18" charset="0"/>
+                                      </a:rPr>
+                                      <m:t>𝑑𝑡</m:t>
+                                    </m:r>
+                                  </m:den>
+                                </m:f>
+                                <m:r>
+                                  <a:rPr lang="en-US" sz="2800" b="0" i="1" smtClean="0">
+                                    <a:latin typeface="Cambria Math" panose="02040503050406030204" pitchFamily="18" charset="0"/>
+                                  </a:rPr>
+                                  <m:t>.                             </m:t>
+                                </m:r>
+                              </m:e>
+                            </m:mr>
+                          </m:m>
+                        </m:e>
+                      </m:d>
+                    </m:oMath>
+                  </m:oMathPara>
+                </a14:m>
+                <a:endParaRPr lang="ru-RU" sz="2800" dirty="0"/>
+              </a:p>
+            </p:txBody>
+          </p:sp>
+        </mc:Choice>
+        <mc:Fallback>
+          <p:sp>
+            <p:nvSpPr>
+              <p:cNvPr id="4" name="TextBox 3"/>
+              <p:cNvSpPr txBox="1">
+                <a:spLocks noRot="1" noChangeAspect="1" noMove="1" noResize="1" noEditPoints="1" noAdjustHandles="1" noChangeArrowheads="1" noChangeShapeType="1" noTextEdit="1"/>
+              </p:cNvSpPr>
+              <p:nvPr/>
+            </p:nvSpPr>
+            <p:spPr>
+              <a:xfrm>
+                <a:off x="1539551" y="1059488"/>
+                <a:ext cx="9509319" cy="2676245"/>
+              </a:xfrm>
+              <a:prstGeom prst="rect">
+                <a:avLst/>
+              </a:prstGeom>
+              <a:blipFill>
+                <a:blip r:embed="rId2"/>
+                <a:stretch>
+                  <a:fillRect/>
+                </a:stretch>
+              </a:blipFill>
+            </p:spPr>
+            <p:txBody>
+              <a:bodyPr/>
+              <a:lstStyle/>
+              <a:p>
+                <a:r>
+                  <a:rPr lang="ru-RU">
+                    <a:noFill/>
+                  </a:rPr>
+                  <a:t> </a:t>
+                </a:r>
+              </a:p>
+            </p:txBody>
+          </p:sp>
+        </mc:Fallback>
+      </mc:AlternateContent>
+      <mc:AlternateContent xmlns:mc="http://schemas.openxmlformats.org/markup-compatibility/2006">
+        <mc:Choice xmlns:a14="http://schemas.microsoft.com/office/drawing/2010/main" Requires="a14">
+          <p:sp>
+            <p:nvSpPr>
+              <p:cNvPr id="6" name="Прямоугольник 5"/>
+              <p:cNvSpPr/>
+              <p:nvPr/>
+            </p:nvSpPr>
+            <p:spPr>
+              <a:xfrm>
+                <a:off x="3217373" y="3777075"/>
+                <a:ext cx="5914953" cy="969433"/>
+              </a:xfrm>
+              <a:prstGeom prst="rect">
+                <a:avLst/>
+              </a:prstGeom>
+            </p:spPr>
+            <p:txBody>
+              <a:bodyPr wrap="none">
+                <a:spAutoFit/>
+              </a:bodyPr>
+              <a:lstStyle/>
+              <a:p>
+                <a14:m>
+                  <m:oMathPara xmlns:m="http://schemas.openxmlformats.org/officeDocument/2006/math">
+                    <m:oMathParaPr>
+                      <m:jc m:val="centerGroup"/>
+                    </m:oMathParaPr>
+                    <m:oMath xmlns:m="http://schemas.openxmlformats.org/officeDocument/2006/math">
+                      <m:sSub>
+                        <m:sSubPr>
+                          <m:ctrlPr>
+                            <a:rPr lang="ru-RU" sz="2800" i="1" smtClean="0">
+                              <a:latin typeface="Cambria Math" panose="02040503050406030204" pitchFamily="18" charset="0"/>
+                            </a:rPr>
+                          </m:ctrlPr>
+                        </m:sSubPr>
+                        <m:e>
+                          <m:r>
+                            <a:rPr lang="en-US" sz="2800" i="1">
+                              <a:latin typeface="Cambria Math" panose="02040503050406030204" pitchFamily="18" charset="0"/>
+                            </a:rPr>
+                            <m:t>𝑈</m:t>
+                          </m:r>
+                        </m:e>
+                        <m:sub>
+                          <m:r>
+                            <a:rPr lang="ru-RU" sz="2800" i="1">
+                              <a:latin typeface="Cambria Math" panose="02040503050406030204" pitchFamily="18" charset="0"/>
+                            </a:rPr>
+                            <m:t>я</m:t>
+                          </m:r>
+                        </m:sub>
+                      </m:sSub>
+                      <m:r>
+                        <a:rPr lang="ru-RU" sz="2800" i="1">
+                          <a:latin typeface="Cambria Math" panose="02040503050406030204" pitchFamily="18" charset="0"/>
+                        </a:rPr>
+                        <m:t>=</m:t>
+                      </m:r>
+                      <m:sSub>
+                        <m:sSubPr>
+                          <m:ctrlPr>
+                            <a:rPr lang="ru-RU" sz="2800" i="1">
+                              <a:latin typeface="Cambria Math" panose="02040503050406030204" pitchFamily="18" charset="0"/>
+                            </a:rPr>
+                          </m:ctrlPr>
+                        </m:sSubPr>
+                        <m:e>
+                          <m:r>
+                            <a:rPr lang="en-US" sz="2800" i="1">
+                              <a:latin typeface="Cambria Math" panose="02040503050406030204" pitchFamily="18" charset="0"/>
+                            </a:rPr>
+                            <m:t>𝐿</m:t>
+                          </m:r>
+                        </m:e>
+                        <m:sub>
+                          <m:r>
+                            <a:rPr lang="ru-RU" sz="2800" i="1">
+                              <a:latin typeface="Cambria Math" panose="02040503050406030204" pitchFamily="18" charset="0"/>
+                            </a:rPr>
+                            <m:t>я</m:t>
+                          </m:r>
+                        </m:sub>
+                      </m:sSub>
+                      <m:f>
+                        <m:fPr>
+                          <m:ctrlPr>
+                            <a:rPr lang="ru-RU" sz="2800" i="1">
+                              <a:latin typeface="Cambria Math" panose="02040503050406030204" pitchFamily="18" charset="0"/>
+                            </a:rPr>
+                          </m:ctrlPr>
+                        </m:fPr>
+                        <m:num>
+                          <m:sSub>
+                            <m:sSubPr>
+                              <m:ctrlPr>
+                                <a:rPr lang="ru-RU" sz="2800" i="1">
+                                  <a:latin typeface="Cambria Math" panose="02040503050406030204" pitchFamily="18" charset="0"/>
+                                </a:rPr>
+                              </m:ctrlPr>
+                            </m:sSubPr>
+                            <m:e>
+                              <m:r>
+                                <a:rPr lang="en-US" sz="2800" i="1">
+                                  <a:latin typeface="Cambria Math" panose="02040503050406030204" pitchFamily="18" charset="0"/>
+                                </a:rPr>
+                                <m:t>𝐽</m:t>
+                              </m:r>
+                            </m:e>
+                            <m:sub>
+                              <m:r>
+                                <m:rPr>
+                                  <m:sty m:val="p"/>
+                                </m:rPr>
+                                <a:rPr lang="el-GR" sz="2800" i="1">
+                                  <a:latin typeface="Cambria Math" panose="02040503050406030204" pitchFamily="18" charset="0"/>
+                                  <a:ea typeface="Cambria Math" panose="02040503050406030204" pitchFamily="18" charset="0"/>
+                                </a:rPr>
+                                <m:t>Σ</m:t>
+                              </m:r>
+                            </m:sub>
+                          </m:sSub>
+                        </m:num>
+                        <m:den>
+                          <m:sSub>
+                            <m:sSubPr>
+                              <m:ctrlPr>
+                                <a:rPr lang="ru-RU" sz="2800" i="1">
+                                  <a:latin typeface="Cambria Math" panose="02040503050406030204" pitchFamily="18" charset="0"/>
+                                </a:rPr>
+                              </m:ctrlPr>
+                            </m:sSubPr>
+                            <m:e>
+                              <m:r>
+                                <a:rPr lang="en-US" sz="2800" i="1">
+                                  <a:latin typeface="Cambria Math" panose="02040503050406030204" pitchFamily="18" charset="0"/>
+                                </a:rPr>
+                                <m:t>𝑘</m:t>
+                              </m:r>
+                            </m:e>
+                            <m:sub>
+                              <m:r>
+                                <a:rPr lang="ru-RU" sz="2800" i="1">
+                                  <a:latin typeface="Cambria Math" panose="02040503050406030204" pitchFamily="18" charset="0"/>
+                                </a:rPr>
+                                <m:t>м</m:t>
+                              </m:r>
+                            </m:sub>
+                          </m:sSub>
+                        </m:den>
+                      </m:f>
+                      <m:sSub>
+                        <m:sSubPr>
+                          <m:ctrlPr>
+                            <a:rPr lang="en-US" sz="2800" i="1">
+                              <a:latin typeface="Cambria Math" panose="02040503050406030204" pitchFamily="18" charset="0"/>
+                            </a:rPr>
+                          </m:ctrlPr>
+                        </m:sSubPr>
+                        <m:e>
+                          <m:r>
+                            <m:rPr>
+                              <m:sty m:val="p"/>
+                            </m:rPr>
+                            <a:rPr lang="el-GR" sz="2800" i="1">
+                              <a:latin typeface="Cambria Math" panose="02040503050406030204" pitchFamily="18" charset="0"/>
+                              <a:ea typeface="Cambria Math" panose="02040503050406030204" pitchFamily="18" charset="0"/>
+                            </a:rPr>
+                            <m:t>Ω</m:t>
+                          </m:r>
+                        </m:e>
+                        <m:sub>
+                          <m:r>
+                            <a:rPr lang="ru-RU" sz="2800" i="1">
+                              <a:latin typeface="Cambria Math" panose="02040503050406030204" pitchFamily="18" charset="0"/>
+                            </a:rPr>
+                            <m:t>д</m:t>
+                          </m:r>
+                        </m:sub>
+                      </m:sSub>
+                      <m:sSup>
+                        <m:sSupPr>
+                          <m:ctrlPr>
+                            <a:rPr lang="ru-RU" sz="2800" i="1" smtClean="0">
+                              <a:latin typeface="Cambria Math" panose="02040503050406030204" pitchFamily="18" charset="0"/>
+                            </a:rPr>
+                          </m:ctrlPr>
+                        </m:sSupPr>
+                        <m:e>
+                          <m:r>
+                            <a:rPr lang="en-US" sz="2800" b="0" i="1" smtClean="0">
+                              <a:latin typeface="Cambria Math" panose="02040503050406030204" pitchFamily="18" charset="0"/>
+                            </a:rPr>
+                            <m:t>𝑝</m:t>
+                          </m:r>
+                        </m:e>
+                        <m:sup>
+                          <m:r>
+                            <a:rPr lang="en-US" sz="2800" b="0" i="1" smtClean="0">
+                              <a:latin typeface="Cambria Math" panose="02040503050406030204" pitchFamily="18" charset="0"/>
+                            </a:rPr>
+                            <m:t>2</m:t>
+                          </m:r>
+                        </m:sup>
+                      </m:sSup>
+                      <m:r>
+                        <a:rPr lang="en-US" sz="2800" b="0" i="1" smtClean="0">
+                          <a:latin typeface="Cambria Math" panose="02040503050406030204" pitchFamily="18" charset="0"/>
+                        </a:rPr>
+                        <m:t>+</m:t>
+                      </m:r>
+                      <m:sSub>
+                        <m:sSubPr>
+                          <m:ctrlPr>
+                            <a:rPr lang="en-US" sz="2800" i="1">
+                              <a:latin typeface="Cambria Math" panose="02040503050406030204" pitchFamily="18" charset="0"/>
+                            </a:rPr>
+                          </m:ctrlPr>
+                        </m:sSubPr>
+                        <m:e>
+                          <m:r>
+                            <a:rPr lang="en-US" sz="2800" i="1">
+                              <a:latin typeface="Cambria Math" panose="02040503050406030204" pitchFamily="18" charset="0"/>
+                            </a:rPr>
+                            <m:t>𝑅</m:t>
+                          </m:r>
+                        </m:e>
+                        <m:sub>
+                          <m:r>
+                            <a:rPr lang="ru-RU" sz="2800" i="1">
+                              <a:latin typeface="Cambria Math" panose="02040503050406030204" pitchFamily="18" charset="0"/>
+                            </a:rPr>
+                            <m:t>я</m:t>
+                          </m:r>
+                        </m:sub>
+                      </m:sSub>
+                      <m:f>
+                        <m:fPr>
+                          <m:ctrlPr>
+                            <a:rPr lang="ru-RU" sz="2800" i="1">
+                              <a:latin typeface="Cambria Math" panose="02040503050406030204" pitchFamily="18" charset="0"/>
+                            </a:rPr>
+                          </m:ctrlPr>
+                        </m:fPr>
+                        <m:num>
+                          <m:sSub>
+                            <m:sSubPr>
+                              <m:ctrlPr>
+                                <a:rPr lang="ru-RU" sz="2800" i="1">
+                                  <a:latin typeface="Cambria Math" panose="02040503050406030204" pitchFamily="18" charset="0"/>
+                                </a:rPr>
+                              </m:ctrlPr>
+                            </m:sSubPr>
+                            <m:e>
+                              <m:r>
+                                <a:rPr lang="en-US" sz="2800" i="1">
+                                  <a:latin typeface="Cambria Math" panose="02040503050406030204" pitchFamily="18" charset="0"/>
+                                </a:rPr>
+                                <m:t>𝐽</m:t>
+                              </m:r>
+                            </m:e>
+                            <m:sub>
+                              <m:r>
+                                <m:rPr>
+                                  <m:sty m:val="p"/>
+                                </m:rPr>
+                                <a:rPr lang="el-GR" sz="2800" i="1">
+                                  <a:latin typeface="Cambria Math" panose="02040503050406030204" pitchFamily="18" charset="0"/>
+                                  <a:ea typeface="Cambria Math" panose="02040503050406030204" pitchFamily="18" charset="0"/>
+                                </a:rPr>
+                                <m:t>Σ</m:t>
+                              </m:r>
+                            </m:sub>
+                          </m:sSub>
+                        </m:num>
+                        <m:den>
+                          <m:sSub>
+                            <m:sSubPr>
+                              <m:ctrlPr>
+                                <a:rPr lang="ru-RU" sz="2800" i="1">
+                                  <a:latin typeface="Cambria Math" panose="02040503050406030204" pitchFamily="18" charset="0"/>
+                                </a:rPr>
+                              </m:ctrlPr>
+                            </m:sSubPr>
+                            <m:e>
+                              <m:r>
+                                <a:rPr lang="en-US" sz="2800" i="1">
+                                  <a:latin typeface="Cambria Math" panose="02040503050406030204" pitchFamily="18" charset="0"/>
+                                </a:rPr>
+                                <m:t>𝑘</m:t>
+                              </m:r>
+                            </m:e>
+                            <m:sub>
+                              <m:r>
+                                <a:rPr lang="ru-RU" sz="2800" i="1">
+                                  <a:latin typeface="Cambria Math" panose="02040503050406030204" pitchFamily="18" charset="0"/>
+                                </a:rPr>
+                                <m:t>м</m:t>
+                              </m:r>
+                            </m:sub>
+                          </m:sSub>
+                        </m:den>
+                      </m:f>
+                      <m:sSub>
+                        <m:sSubPr>
+                          <m:ctrlPr>
+                            <a:rPr lang="en-US" sz="2800" i="1">
+                              <a:latin typeface="Cambria Math" panose="02040503050406030204" pitchFamily="18" charset="0"/>
+                            </a:rPr>
+                          </m:ctrlPr>
+                        </m:sSubPr>
+                        <m:e>
+                          <m:r>
+                            <m:rPr>
+                              <m:sty m:val="p"/>
+                            </m:rPr>
+                            <a:rPr lang="el-GR" sz="2800" i="1">
+                              <a:latin typeface="Cambria Math" panose="02040503050406030204" pitchFamily="18" charset="0"/>
+                              <a:ea typeface="Cambria Math" panose="02040503050406030204" pitchFamily="18" charset="0"/>
+                            </a:rPr>
+                            <m:t>Ω</m:t>
+                          </m:r>
+                        </m:e>
+                        <m:sub>
+                          <m:r>
+                            <a:rPr lang="ru-RU" sz="2800" i="1">
+                              <a:latin typeface="Cambria Math" panose="02040503050406030204" pitchFamily="18" charset="0"/>
+                            </a:rPr>
+                            <m:t>д</m:t>
+                          </m:r>
+                        </m:sub>
+                      </m:sSub>
+                      <m:r>
+                        <a:rPr lang="en-US" sz="2800" b="0" i="1" smtClean="0">
+                          <a:latin typeface="Cambria Math" panose="02040503050406030204" pitchFamily="18" charset="0"/>
+                        </a:rPr>
+                        <m:t>𝑝</m:t>
+                      </m:r>
+                      <m:r>
+                        <a:rPr lang="en-US" sz="2800" b="0" i="1" smtClean="0">
+                          <a:latin typeface="Cambria Math" panose="02040503050406030204" pitchFamily="18" charset="0"/>
+                        </a:rPr>
+                        <m:t>+</m:t>
+                      </m:r>
+                      <m:sSub>
+                        <m:sSubPr>
+                          <m:ctrlPr>
+                            <a:rPr lang="en-US" sz="2800" i="1">
+                              <a:latin typeface="Cambria Math" panose="02040503050406030204" pitchFamily="18" charset="0"/>
+                            </a:rPr>
+                          </m:ctrlPr>
+                        </m:sSubPr>
+                        <m:e>
+                          <m:r>
+                            <a:rPr lang="en-US" sz="2800" i="1">
+                              <a:latin typeface="Cambria Math" panose="02040503050406030204" pitchFamily="18" charset="0"/>
+                            </a:rPr>
+                            <m:t>𝑘</m:t>
+                          </m:r>
+                        </m:e>
+                        <m:sub>
+                          <m:r>
+                            <m:rPr>
+                              <m:sty m:val="p"/>
+                            </m:rPr>
+                            <a:rPr lang="el-GR" sz="2800" i="1">
+                              <a:latin typeface="Cambria Math" panose="02040503050406030204" pitchFamily="18" charset="0"/>
+                              <a:ea typeface="Cambria Math" panose="02040503050406030204" pitchFamily="18" charset="0"/>
+                            </a:rPr>
+                            <m:t>Ω</m:t>
+                          </m:r>
+                        </m:sub>
+                      </m:sSub>
+                      <m:sSub>
+                        <m:sSubPr>
+                          <m:ctrlPr>
+                            <a:rPr lang="en-US" sz="2800" i="1">
+                              <a:latin typeface="Cambria Math" panose="02040503050406030204" pitchFamily="18" charset="0"/>
+                            </a:rPr>
+                          </m:ctrlPr>
+                        </m:sSubPr>
+                        <m:e>
+                          <m:r>
+                            <m:rPr>
+                              <m:sty m:val="p"/>
+                            </m:rPr>
+                            <a:rPr lang="el-GR" sz="2800" i="1">
+                              <a:latin typeface="Cambria Math" panose="02040503050406030204" pitchFamily="18" charset="0"/>
+                              <a:ea typeface="Cambria Math" panose="02040503050406030204" pitchFamily="18" charset="0"/>
+                            </a:rPr>
+                            <m:t>Ω</m:t>
+                          </m:r>
+                        </m:e>
+                        <m:sub>
+                          <m:r>
+                            <a:rPr lang="ru-RU" sz="2800" i="1">
+                              <a:latin typeface="Cambria Math" panose="02040503050406030204" pitchFamily="18" charset="0"/>
+                            </a:rPr>
+                            <m:t>д</m:t>
+                          </m:r>
+                        </m:sub>
+                      </m:sSub>
+                    </m:oMath>
+                  </m:oMathPara>
+                </a14:m>
+                <a:endParaRPr lang="ru-RU" sz="2800" dirty="0"/>
+              </a:p>
+            </p:txBody>
+          </p:sp>
+        </mc:Choice>
+        <mc:Fallback>
+          <p:sp>
+            <p:nvSpPr>
+              <p:cNvPr id="6" name="Прямоугольник 5"/>
+              <p:cNvSpPr>
+                <a:spLocks noRot="1" noChangeAspect="1" noMove="1" noResize="1" noEditPoints="1" noAdjustHandles="1" noChangeArrowheads="1" noChangeShapeType="1" noTextEdit="1"/>
+              </p:cNvSpPr>
+              <p:nvPr/>
+            </p:nvSpPr>
+            <p:spPr>
+              <a:xfrm>
+                <a:off x="3217373" y="3777075"/>
+                <a:ext cx="5914953" cy="969433"/>
+              </a:xfrm>
+              <a:prstGeom prst="rect">
+                <a:avLst/>
+              </a:prstGeom>
+              <a:blipFill>
+                <a:blip r:embed="rId3"/>
+                <a:stretch>
+                  <a:fillRect/>
+                </a:stretch>
+              </a:blipFill>
+            </p:spPr>
+            <p:txBody>
+              <a:bodyPr/>
+              <a:lstStyle/>
+              <a:p>
+                <a:r>
+                  <a:rPr lang="ru-RU">
+                    <a:noFill/>
+                  </a:rPr>
+                  <a:t> </a:t>
+                </a:r>
+              </a:p>
+            </p:txBody>
+          </p:sp>
+        </mc:Fallback>
+      </mc:AlternateContent>
       <p:pic>
         <p:nvPicPr>
-          <p:cNvPr id="6" name="Picture 1">
+          <p:cNvPr id="8" name="Picture 2">
             <a:extLst>
               <a:ext uri="{FF2B5EF4-FFF2-40B4-BE49-F238E27FC236}">
-                <a16:creationId xmlns:a16="http://schemas.microsoft.com/office/drawing/2014/main" id="{B76850A5-B517-4F3C-99DB-3F5BA278E6C6}"/>
+                <a16:creationId xmlns:a16="http://schemas.microsoft.com/office/drawing/2014/main" id="{34A88021-ADF8-405C-9BB1-621815F0B0AD}"/>
               </a:ext>
             </a:extLst>
           </p:cNvPr>
@@ -3816,7 +6386,7 @@
           <p:nvPr/>
         </p:nvPicPr>
         <p:blipFill>
-          <a:blip r:embed="rId2" cstate="print"/>
+          <a:blip r:embed="rId4" cstate="print"/>
           <a:srcRect/>
           <a:stretch>
             <a:fillRect/>
@@ -3824,53 +6394,19 @@
         </p:blipFill>
         <p:spPr bwMode="auto">
           <a:xfrm>
-            <a:off x="1797696" y="1018146"/>
-            <a:ext cx="8596608" cy="3062047"/>
+            <a:off x="1698557" y="4930591"/>
+            <a:ext cx="8952584" cy="1457397"/>
           </a:xfrm>
           <a:prstGeom prst="rect">
             <a:avLst/>
           </a:prstGeom>
           <a:noFill/>
-          <a:ln w="9525">
-            <a:noFill/>
-            <a:miter lim="800000"/>
-            <a:headEnd/>
-            <a:tailEnd/>
-          </a:ln>
-        </p:spPr>
-      </p:pic>
-      <p:pic>
-        <p:nvPicPr>
-          <p:cNvPr id="7" name="Picture 2">
-            <a:extLst>
-              <a:ext uri="{FF2B5EF4-FFF2-40B4-BE49-F238E27FC236}">
-                <a16:creationId xmlns:a16="http://schemas.microsoft.com/office/drawing/2014/main" id="{1185C390-F0A1-4B90-ABD0-FFDC2FB2CFA6}"/>
-              </a:ext>
-            </a:extLst>
-          </p:cNvPr>
-          <p:cNvPicPr>
-            <a:picLocks noChangeAspect="1" noChangeArrowheads="1"/>
-          </p:cNvPicPr>
-          <p:nvPr/>
-        </p:nvPicPr>
-        <p:blipFill>
-          <a:blip r:embed="rId3" cstate="print"/>
-          <a:srcRect/>
-          <a:stretch>
-            <a:fillRect/>
-          </a:stretch>
-        </p:blipFill>
-        <p:spPr bwMode="auto">
-          <a:xfrm>
-            <a:off x="1666875" y="4366737"/>
-            <a:ext cx="9020153" cy="1822486"/>
-          </a:xfrm>
-          <a:prstGeom prst="rect">
-            <a:avLst/>
-          </a:prstGeom>
-          <a:noFill/>
-          <a:ln w="9525">
-            <a:noFill/>
+          <a:ln w="38100">
+            <a:solidFill>
+              <a:schemeClr val="bg2">
+                <a:lumMod val="50000"/>
+              </a:schemeClr>
+            </a:solidFill>
             <a:miter lim="800000"/>
             <a:headEnd/>
             <a:tailEnd/>
@@ -3880,7 +6416,7 @@
     </p:spTree>
     <p:extLst>
       <p:ext uri="{BB962C8B-B14F-4D97-AF65-F5344CB8AC3E}">
-        <p14:creationId xmlns:p14="http://schemas.microsoft.com/office/powerpoint/2010/main" val="893791715"/>
+        <p14:creationId xmlns:p14="http://schemas.microsoft.com/office/powerpoint/2010/main" val="11468232"/>
       </p:ext>
     </p:extLst>
   </p:cSld>
